--- a/10-Knowledge-Products/KP1-GEA/videos/module_2/en/decks/KP1_M2_2.5_Deck_v0.2.pptx
+++ b/10-Knowledge-Products/KP1-GEA/videos/module_2/en/decks/KP1_M2_2.5_Deck_v0.2.pptx
@@ -14,14 +14,14 @@
     <p:handoutMasterId r:id="rId47"/>
   </p:handoutMasterIdLst>
   <p:sldIdLst>
-    <p:sldId id="2681" r:id="rId8"/>
-    <p:sldId id="2725" r:id="rId16"/>
-    <p:sldId id="2726" r:id="rId15"/>
-    <p:sldId id="2727" r:id="rId14"/>
-    <p:sldId id="2728" r:id="rId13"/>
     <p:sldId id="2729" r:id="rId12"/>
     <p:sldId id="2730" r:id="rId11"/>
     <p:sldId id="2731" r:id="rId10"/>
+    <p:sldId id="2732" r:id="rId54"/>
+    <p:sldId id="2733" r:id="rId55"/>
+    <p:sldId id="2734" r:id="rId56"/>
+    <p:sldId id="2735" r:id="rId57"/>
+    <p:sldId id="2736" r:id="rId58"/>
   </p:sldIdLst>
   <p:sldSz cx="12192000" cy="6858000"/>
   <p:notesSz cx="6858000" cy="9144000"/>
@@ -888,374 +888,6 @@
 </p:notesMaster>
 </file>
 
-<file path=ppt/notesSlides/notesSlide21.xml><?xml version="1.0" encoding="utf-8"?>
-<p:notes xmlns:a="http://schemas.openxmlformats.org/drawingml/2006/main" xmlns:p="http://schemas.openxmlformats.org/presentationml/2006/main" xmlns:r="http://schemas.openxmlformats.org/officeDocument/2006/relationships">
-  <p:cSld>
-    <p:spTree>
-      <p:nvGrpSpPr>
-        <p:cNvPr id="1" name=""/>
-        <p:cNvGrpSpPr/>
-        <p:nvPr/>
-      </p:nvGrpSpPr>
-      <p:grpSpPr>
-        <a:xfrm>
-          <a:off x="0" y="0"/>
-          <a:ext cx="0" cy="0"/>
-          <a:chOff x="0" y="0"/>
-          <a:chExt cx="0" cy="0"/>
-        </a:xfrm>
-      </p:grpSpPr>
-      <p:sp>
-        <p:nvSpPr>
-          <p:cNvPr id="2" name="Slide Image Placeholder 1"/>
-          <p:cNvSpPr>
-            <a:spLocks noGrp="1"/>
-          </p:cNvSpPr>
-          <p:nvPr>
-            <p:ph type="sldImg" idx="2"/>
-          </p:nvPr>
-        </p:nvSpPr>
-        <p:spPr/>
-      </p:sp>
-      <p:sp>
-        <p:nvSpPr>
-          <p:cNvPr id="3" name="Notes Placeholder 2"/>
-          <p:cNvSpPr>
-            <a:spLocks noGrp="1"/>
-          </p:cNvSpPr>
-          <p:nvPr>
-            <p:ph type="body" idx="3" sz="quarter"/>
-          </p:nvPr>
-        </p:nvSpPr>
-        <p:spPr/>
-        <p:txBody>
-          <a:bodyPr/>
-          <a:lstStyle/>
-          <a:p>
-            <a:r>
-              <a:t>Title card for standalone video 2.5. Content slides are identical to the corresponding section of the combined deck KP1_M2_Deck_v0.2.pptx; voice-over is in each slide’s notes.</a:t>
-            </a:r>
-          </a:p>
-        </p:txBody>
-      </p:sp>
-      <p:sp>
-        <p:nvSpPr>
-          <p:cNvPr id="4" name="Slide Number Placeholder 3"/>
-          <p:cNvSpPr>
-            <a:spLocks noGrp="1"/>
-          </p:cNvSpPr>
-          <p:nvPr>
-            <p:ph type="sldNum" idx="5" sz="quarter"/>
-          </p:nvPr>
-        </p:nvSpPr>
-        <p:spPr/>
-      </p:sp>
-    </p:spTree>
-  </p:cSld>
-  <p:clrMapOvr>
-    <a:masterClrMapping/>
-  </p:clrMapOvr>
-</p:notes>
-</file>
-
-<file path=ppt/notesSlides/notesSlide32.xml><?xml version="1.0" encoding="utf-8"?>
-<p:notes xmlns:a="http://schemas.openxmlformats.org/drawingml/2006/main" xmlns:p="http://schemas.openxmlformats.org/presentationml/2006/main" xmlns:r="http://schemas.openxmlformats.org/officeDocument/2006/relationships">
-  <p:cSld>
-    <p:spTree>
-      <p:nvGrpSpPr>
-        <p:cNvPr id="1" name=""/>
-        <p:cNvGrpSpPr/>
-        <p:nvPr/>
-      </p:nvGrpSpPr>
-      <p:grpSpPr>
-        <a:xfrm>
-          <a:off x="0" y="0"/>
-          <a:ext cx="0" cy="0"/>
-          <a:chOff x="0" y="0"/>
-          <a:chExt cx="0" cy="0"/>
-        </a:xfrm>
-      </p:grpSpPr>
-      <p:sp>
-        <p:nvSpPr>
-          <p:cNvPr id="2" name="Slide Image Placeholder 1"/>
-          <p:cNvSpPr>
-            <a:spLocks noGrp="1"/>
-          </p:cNvSpPr>
-          <p:nvPr>
-            <p:ph type="sldImg" idx="2"/>
-          </p:nvPr>
-        </p:nvSpPr>
-        <p:spPr/>
-      </p:sp>
-      <p:sp>
-        <p:nvSpPr>
-          <p:cNvPr id="3" name="Notes Placeholder 2"/>
-          <p:cNvSpPr>
-            <a:spLocks noGrp="1"/>
-          </p:cNvSpPr>
-          <p:nvPr>
-            <p:ph type="body" idx="3" sz="quarter"/>
-          </p:nvPr>
-        </p:nvSpPr>
-        <p:spPr/>
-        <p:txBody>
-          <a:bodyPr/>
-          <a:lstStyle/>
-          <a:p>
-            <a:r>
-              <a:t>VO, slide 1: Put the four layers on a real sector. Progressa is a demonstration country with an education system like many across the continent: a ministry, an examination authority, a learner registry, an identity authority, and a digital government authority running shared platforms.</a:t>
-            </a:r>
-          </a:p>
-          <a:p/>
-          <a:p>
-            <a:r>
-              <a:t>On screen: Progressa is a fictional demonstration country — say so once, here.</a:t>
-            </a:r>
-          </a:p>
-        </p:txBody>
-      </p:sp>
-      <p:sp>
-        <p:nvSpPr>
-          <p:cNvPr id="4" name="Slide Number Placeholder 3"/>
-          <p:cNvSpPr>
-            <a:spLocks noGrp="1"/>
-          </p:cNvSpPr>
-          <p:nvPr>
-            <p:ph type="sldNum" idx="5" sz="quarter"/>
-          </p:nvPr>
-        </p:nvSpPr>
-        <p:spPr/>
-      </p:sp>
-    </p:spTree>
-  </p:cSld>
-  <p:clrMapOvr>
-    <a:masterClrMapping/>
-  </p:clrMapOvr>
-</p:notes>
-</file>
-
-<file path=ppt/notesSlides/notesSlide33.xml><?xml version="1.0" encoding="utf-8"?>
-<p:notes xmlns:a="http://schemas.openxmlformats.org/drawingml/2006/main" xmlns:p="http://schemas.openxmlformats.org/presentationml/2006/main" xmlns:r="http://schemas.openxmlformats.org/officeDocument/2006/relationships">
-  <p:cSld>
-    <p:spTree>
-      <p:nvGrpSpPr>
-        <p:cNvPr id="1" name=""/>
-        <p:cNvGrpSpPr/>
-        <p:nvPr/>
-      </p:nvGrpSpPr>
-      <p:grpSpPr>
-        <a:xfrm>
-          <a:off x="0" y="0"/>
-          <a:ext cx="0" cy="0"/>
-          <a:chOff x="0" y="0"/>
-          <a:chExt cx="0" cy="0"/>
-        </a:xfrm>
-      </p:grpSpPr>
-      <p:sp>
-        <p:nvSpPr>
-          <p:cNvPr id="2" name="Slide Image Placeholder 1"/>
-          <p:cNvSpPr>
-            <a:spLocks noGrp="1"/>
-          </p:cNvSpPr>
-          <p:nvPr>
-            <p:ph type="sldImg" idx="2"/>
-          </p:nvPr>
-        </p:nvSpPr>
-        <p:spPr/>
-      </p:sp>
-      <p:sp>
-        <p:nvSpPr>
-          <p:cNvPr id="3" name="Notes Placeholder 2"/>
-          <p:cNvSpPr>
-            <a:spLocks noGrp="1"/>
-          </p:cNvSpPr>
-          <p:nvPr>
-            <p:ph type="body" idx="3" sz="quarter"/>
-          </p:nvPr>
-        </p:nvSpPr>
-        <p:spPr/>
-        <p:txBody>
-          <a:bodyPr/>
-          <a:lstStyle/>
-          <a:p>
-            <a:r>
-              <a:t>VO: Start by classifying, because classification gives us the head start. The Ministry of Education is a policy unit — it sets education policy and owns the rules. The National Examination Authority runs examinations at scale and certifies results — a service-delivery authority with a regulatory edge. The Learner Registry is a state registry — the authoritative single source for who is a learner. The National Identity Authority is a registry and a shared platform — it owns the person identity every sector reuses. The Digital Government Authority runs shared platforms: data exchange and payments. Five bodies, classified in a minute, and we already expect what each one does.</a:t>
-            </a:r>
-          </a:p>
-          <a:p/>
-          <a:p>
-            <a:r>
-              <a:t>All institutions are fictional — no emblems, no real agency names on screen.</a:t>
-            </a:r>
-          </a:p>
-        </p:txBody>
-      </p:sp>
-      <p:sp>
-        <p:nvSpPr>
-          <p:cNvPr id="4" name="Slide Number Placeholder 3"/>
-          <p:cNvSpPr>
-            <a:spLocks noGrp="1"/>
-          </p:cNvSpPr>
-          <p:nvPr>
-            <p:ph type="sldNum" idx="5" sz="quarter"/>
-          </p:nvPr>
-        </p:nvSpPr>
-        <p:spPr/>
-      </p:sp>
-    </p:spTree>
-  </p:cSld>
-  <p:clrMapOvr>
-    <a:masterClrMapping/>
-  </p:clrMapOvr>
-</p:notes>
-</file>
-
-<file path=ppt/notesSlides/notesSlide34.xml><?xml version="1.0" encoding="utf-8"?>
-<p:notes xmlns:a="http://schemas.openxmlformats.org/drawingml/2006/main" xmlns:p="http://schemas.openxmlformats.org/presentationml/2006/main" xmlns:r="http://schemas.openxmlformats.org/officeDocument/2006/relationships">
-  <p:cSld>
-    <p:spTree>
-      <p:nvGrpSpPr>
-        <p:cNvPr id="1" name=""/>
-        <p:cNvGrpSpPr/>
-        <p:nvPr/>
-      </p:nvGrpSpPr>
-      <p:grpSpPr>
-        <a:xfrm>
-          <a:off x="0" y="0"/>
-          <a:ext cx="0" cy="0"/>
-          <a:chOff x="0" y="0"/>
-          <a:chExt cx="0" cy="0"/>
-        </a:xfrm>
-      </p:grpSpPr>
-      <p:sp>
-        <p:nvSpPr>
-          <p:cNvPr id="2" name="Slide Image Placeholder 1"/>
-          <p:cNvSpPr>
-            <a:spLocks noGrp="1"/>
-          </p:cNvSpPr>
-          <p:nvPr>
-            <p:ph type="sldImg" idx="2"/>
-          </p:nvPr>
-        </p:nvSpPr>
-        <p:spPr/>
-      </p:sp>
-      <p:sp>
-        <p:nvSpPr>
-          <p:cNvPr id="3" name="Notes Placeholder 2"/>
-          <p:cNvSpPr>
-            <a:spLocks noGrp="1"/>
-          </p:cNvSpPr>
-          <p:nvPr>
-            <p:ph type="body" idx="3" sz="quarter"/>
-          </p:nvPr>
-        </p:nvSpPr>
-        <p:spPr/>
-        <p:txBody>
-          <a:bodyPr/>
-          <a:lstStyle/>
-          <a:p>
-            <a:r>
-              <a:t>VO: Now the Business layer — capabilities and services. Register a learner: owned by the Learner Registry. Run an examination and certify a result: the Examination Authority. Prove who a learner is: the Identity Authority. Set policy and fund schools: the Ministry. Notice that we describe what each body does — its capabilities — not how it is organised inside. The citizen-facing services sit on top: enrol a child, sit an examination, receive a certificate, transfer between schools. Each service traces down to a capability owned by exactly one body. When two bodies both claim the same capability — say, each keeping its own list of learners — you have found your first gap, just by drawing the Business layer.</a:t>
-            </a:r>
-          </a:p>
-        </p:txBody>
-      </p:sp>
-      <p:sp>
-        <p:nvSpPr>
-          <p:cNvPr id="4" name="Slide Number Placeholder 3"/>
-          <p:cNvSpPr>
-            <a:spLocks noGrp="1"/>
-          </p:cNvSpPr>
-          <p:nvPr>
-            <p:ph type="sldNum" idx="5" sz="quarter"/>
-          </p:nvPr>
-        </p:nvSpPr>
-        <p:spPr/>
-      </p:sp>
-    </p:spTree>
-  </p:cSld>
-  <p:clrMapOvr>
-    <a:masterClrMapping/>
-  </p:clrMapOvr>
-</p:notes>
-</file>
-
-<file path=ppt/notesSlides/notesSlide35.xml><?xml version="1.0" encoding="utf-8"?>
-<p:notes xmlns:a="http://schemas.openxmlformats.org/drawingml/2006/main" xmlns:p="http://schemas.openxmlformats.org/presentationml/2006/main" xmlns:r="http://schemas.openxmlformats.org/officeDocument/2006/relationships">
-  <p:cSld>
-    <p:spTree>
-      <p:nvGrpSpPr>
-        <p:cNvPr id="1" name=""/>
-        <p:cNvGrpSpPr/>
-        <p:nvPr/>
-      </p:nvGrpSpPr>
-      <p:grpSpPr>
-        <a:xfrm>
-          <a:off x="0" y="0"/>
-          <a:ext cx="0" cy="0"/>
-          <a:chOff x="0" y="0"/>
-          <a:chExt cx="0" cy="0"/>
-        </a:xfrm>
-      </p:grpSpPr>
-      <p:sp>
-        <p:nvSpPr>
-          <p:cNvPr id="2" name="Slide Image Placeholder 1"/>
-          <p:cNvSpPr>
-            <a:spLocks noGrp="1"/>
-          </p:cNvSpPr>
-          <p:nvPr>
-            <p:ph type="sldImg" idx="2"/>
-          </p:nvPr>
-        </p:nvSpPr>
-        <p:spPr/>
-      </p:sp>
-      <p:sp>
-        <p:nvSpPr>
-          <p:cNvPr id="3" name="Notes Placeholder 2"/>
-          <p:cNvSpPr>
-            <a:spLocks noGrp="1"/>
-          </p:cNvSpPr>
-          <p:nvPr>
-            <p:ph type="body" idx="3" sz="quarter"/>
-          </p:nvPr>
-        </p:nvSpPr>
-        <p:spPr/>
-        <p:txBody>
-          <a:bodyPr/>
-          <a:lstStyle/>
-          <a:p>
-            <a:r>
-              <a:t>VO: The Data layer names the domains and their owners. The Person domain — owned by the Identity Authority; everyone else uses the person identity, no one else mints it. The Learner domain — owned by the Learner Registry. Examination results — owned by the Examination Authority. Schools — owned by the Ministry. One domain, one owner, one authoritative copy. The once-only principle now becomes concrete: when the Examination Authority needs to know who a learner is, it consumes the Learner Registry and the Identity Authority — it does not keep its own private copy of the learner that drifts out of date. If you find the Examination Authority maintaining its own learner list, that is a duplicate registry, and you write it down.</a:t>
-            </a:r>
-          </a:p>
-          <a:p/>
-          <a:p>
-            <a:r>
-              <a:t>The duplicate-registry example previews the Assess gaps in 2.6 — name the link.</a:t>
-            </a:r>
-          </a:p>
-        </p:txBody>
-      </p:sp>
-      <p:sp>
-        <p:nvSpPr>
-          <p:cNvPr id="4" name="Slide Number Placeholder 3"/>
-          <p:cNvSpPr>
-            <a:spLocks noGrp="1"/>
-          </p:cNvSpPr>
-          <p:nvPr>
-            <p:ph type="sldNum" idx="5" sz="quarter"/>
-          </p:nvPr>
-        </p:nvSpPr>
-        <p:spPr/>
-      </p:sp>
-    </p:spTree>
-  </p:cSld>
-  <p:clrMapOvr>
-    <a:masterClrMapping/>
-  </p:clrMapOvr>
-</p:notes>
-</file>
-
 <file path=ppt/notesSlides/notesSlide36.xml><?xml version="1.0" encoding="utf-8"?>
 <p:notes xmlns:a="http://schemas.openxmlformats.org/drawingml/2006/main" xmlns:p="http://schemas.openxmlformats.org/presentationml/2006/main" xmlns:r="http://schemas.openxmlformats.org/officeDocument/2006/relationships">
   <p:cSld>
@@ -1301,13 +933,7 @@
           <a:lstStyle/>
           <a:p>
             <a:r>
-              <a:t>VO: The Application layer maps software to those capabilities. An enrolment system supports the register-a-learner capability and uses the Learner and Person domains. An examination-management system supports run-an-examination. An identity-verification service supports prove-identity. Each application points up to a capability and across to the data domains it uses — so you can see, at a glance, which systems would break if the Identity Authority changed, and whether two systems are quietly doing the same job. Underneath, the Technology layer: the shared identity platform, the data-exchange backbone run by the Digital Government Authority, the hosting. A short list of shared standards — not a server audit.</a:t>
-            </a:r>
-          </a:p>
-          <a:p/>
-          <a:p>
-            <a:r>
-              <a:t>Application names stay generic and descriptive — no vendor or product names on screen.</a:t>
+              <a:t>Title card — the cold open. The hosts name the module, the video number, the title and the single message on this slide; no scripted narration. Hold until the opener begins; the opener is narrated on the next slide.</a:t>
             </a:r>
           </a:p>
         </p:txBody>
@@ -1377,19 +1003,13 @@
           <a:lstStyle/>
           <a:p>
             <a:r>
-              <a:t>PRACTICE BOX (on-screen only — never read it, never paraphrase it, never point at it). It replaces the narrated handoff: this video ends on the recap and the Sources slide.</a:t>
+              <a:t>VO: Put the four layers on a real sector. Progressa is a demonstration country with an education system like many across the continent: a ministry, an examination authority, a learner registry, an identity authority, and a digital government authority running shared platforms.</a:t>
             </a:r>
           </a:p>
           <a:p/>
           <a:p>
             <a:r>
-              <a:t>VO: Trace one service down. Sit an examination and get a certificate: the Examination Authority's run-an-examination capability, the exam-management application, three data domains — learner, person, result — and the shared data-exchange and identity platforms underneath.</a:t>
-            </a:r>
-          </a:p>
-          <a:p/>
-          <a:p>
-            <a:r>
-              <a:t>Centrepiece and recap of 2.5. Reveal one band at a time, top to bottom, in the order the VO names them.</a:t>
+              <a:t>On screen: Progressa is a fictional demonstration country — say so once, here.</a:t>
             </a:r>
           </a:p>
         </p:txBody>
@@ -1415,6 +1035,386 @@
 </file>
 
 <file path=ppt/notesSlides/notesSlide38.xml><?xml version="1.0" encoding="utf-8"?>
+<p:notes xmlns:a="http://schemas.openxmlformats.org/drawingml/2006/main" xmlns:p="http://schemas.openxmlformats.org/presentationml/2006/main" xmlns:r="http://schemas.openxmlformats.org/officeDocument/2006/relationships">
+  <p:cSld>
+    <p:spTree>
+      <p:nvGrpSpPr>
+        <p:cNvPr id="1" name=""/>
+        <p:cNvGrpSpPr/>
+        <p:nvPr/>
+      </p:nvGrpSpPr>
+      <p:grpSpPr>
+        <a:xfrm>
+          <a:off x="0" y="0"/>
+          <a:ext cx="0" cy="0"/>
+          <a:chOff x="0" y="0"/>
+          <a:chExt cx="0" cy="0"/>
+        </a:xfrm>
+      </p:grpSpPr>
+      <p:sp>
+        <p:nvSpPr>
+          <p:cNvPr id="2" name="Slide Image Placeholder 1"/>
+          <p:cNvSpPr>
+            <a:spLocks noGrp="1"/>
+          </p:cNvSpPr>
+          <p:nvPr>
+            <p:ph type="sldImg" idx="2"/>
+          </p:nvPr>
+        </p:nvSpPr>
+        <p:spPr/>
+      </p:sp>
+      <p:sp>
+        <p:nvSpPr>
+          <p:cNvPr id="3" name="Notes Placeholder 2"/>
+          <p:cNvSpPr>
+            <a:spLocks noGrp="1"/>
+          </p:cNvSpPr>
+          <p:nvPr>
+            <p:ph type="body" idx="3" sz="quarter"/>
+          </p:nvPr>
+        </p:nvSpPr>
+        <p:spPr/>
+        <p:txBody>
+          <a:bodyPr/>
+          <a:lstStyle/>
+          <a:p>
+            <a:r>
+              <a:t>VO: Start by classifying, because classification gives us the head start. The Ministry of Education is a policy unit — it sets education policy and owns the rules. The National Examination Authority runs examinations at scale and certifies results — a service-delivery authority with a regulatory edge. The Learner Registry is a state registry — the authoritative single source for who is a learner. The National Identity Authority is a registry and a shared platform — it owns the person identity every sector reuses. The Digital Government Authority runs shared platforms: data exchange and payments. Five bodies, classified in a minute, and we already expect what each one does.</a:t>
+            </a:r>
+          </a:p>
+          <a:p/>
+          <a:p>
+            <a:r>
+              <a:t>All institutions are fictional — no emblems, no real agency names on screen.</a:t>
+            </a:r>
+          </a:p>
+        </p:txBody>
+      </p:sp>
+      <p:sp>
+        <p:nvSpPr>
+          <p:cNvPr id="4" name="Slide Number Placeholder 3"/>
+          <p:cNvSpPr>
+            <a:spLocks noGrp="1"/>
+          </p:cNvSpPr>
+          <p:nvPr>
+            <p:ph type="sldNum" idx="5" sz="quarter"/>
+          </p:nvPr>
+        </p:nvSpPr>
+        <p:spPr/>
+      </p:sp>
+    </p:spTree>
+  </p:cSld>
+  <p:clrMapOvr>
+    <a:masterClrMapping/>
+  </p:clrMapOvr>
+</p:notes>
+</file>
+
+<file path=ppt/notesSlides/notesSlide39.xml><?xml version="1.0" encoding="utf-8"?>
+<p:notes xmlns:a="http://schemas.openxmlformats.org/drawingml/2006/main" xmlns:p="http://schemas.openxmlformats.org/presentationml/2006/main" xmlns:r="http://schemas.openxmlformats.org/officeDocument/2006/relationships">
+  <p:cSld>
+    <p:spTree>
+      <p:nvGrpSpPr>
+        <p:cNvPr id="1" name=""/>
+        <p:cNvGrpSpPr/>
+        <p:nvPr/>
+      </p:nvGrpSpPr>
+      <p:grpSpPr>
+        <a:xfrm>
+          <a:off x="0" y="0"/>
+          <a:ext cx="0" cy="0"/>
+          <a:chOff x="0" y="0"/>
+          <a:chExt cx="0" cy="0"/>
+        </a:xfrm>
+      </p:grpSpPr>
+      <p:sp>
+        <p:nvSpPr>
+          <p:cNvPr id="2" name="Slide Image Placeholder 1"/>
+          <p:cNvSpPr>
+            <a:spLocks noGrp="1"/>
+          </p:cNvSpPr>
+          <p:nvPr>
+            <p:ph type="sldImg" idx="2"/>
+          </p:nvPr>
+        </p:nvSpPr>
+        <p:spPr/>
+      </p:sp>
+      <p:sp>
+        <p:nvSpPr>
+          <p:cNvPr id="3" name="Notes Placeholder 2"/>
+          <p:cNvSpPr>
+            <a:spLocks noGrp="1"/>
+          </p:cNvSpPr>
+          <p:nvPr>
+            <p:ph type="body" idx="3" sz="quarter"/>
+          </p:nvPr>
+        </p:nvSpPr>
+        <p:spPr/>
+        <p:txBody>
+          <a:bodyPr/>
+          <a:lstStyle/>
+          <a:p>
+            <a:r>
+              <a:t>VO: Now the Business layer — capabilities and services. Register a learner: owned by the Learner Registry. Run an examination and certify a result: the Examination Authority. Prove who a learner is: the Identity Authority. Set policy and fund schools: the Ministry. Notice that we describe what each body does — its capabilities — not how it is organised inside. The citizen-facing services sit on top: enrol a child, sit an examination, receive a certificate, transfer between schools. Each service traces down to a capability owned by exactly one body. When two bodies both claim the same capability — say, each keeping its own list of learners — you have found your first gap, just by drawing the Business layer.</a:t>
+            </a:r>
+          </a:p>
+        </p:txBody>
+      </p:sp>
+      <p:sp>
+        <p:nvSpPr>
+          <p:cNvPr id="4" name="Slide Number Placeholder 3"/>
+          <p:cNvSpPr>
+            <a:spLocks noGrp="1"/>
+          </p:cNvSpPr>
+          <p:nvPr>
+            <p:ph type="sldNum" idx="5" sz="quarter"/>
+          </p:nvPr>
+        </p:nvSpPr>
+        <p:spPr/>
+      </p:sp>
+    </p:spTree>
+  </p:cSld>
+  <p:clrMapOvr>
+    <a:masterClrMapping/>
+  </p:clrMapOvr>
+</p:notes>
+</file>
+
+<file path=ppt/notesSlides/notesSlide40.xml><?xml version="1.0" encoding="utf-8"?>
+<p:notes xmlns:a="http://schemas.openxmlformats.org/drawingml/2006/main" xmlns:p="http://schemas.openxmlformats.org/presentationml/2006/main" xmlns:r="http://schemas.openxmlformats.org/officeDocument/2006/relationships">
+  <p:cSld>
+    <p:spTree>
+      <p:nvGrpSpPr>
+        <p:cNvPr id="1" name=""/>
+        <p:cNvGrpSpPr/>
+        <p:nvPr/>
+      </p:nvGrpSpPr>
+      <p:grpSpPr>
+        <a:xfrm>
+          <a:off x="0" y="0"/>
+          <a:ext cx="0" cy="0"/>
+          <a:chOff x="0" y="0"/>
+          <a:chExt cx="0" cy="0"/>
+        </a:xfrm>
+      </p:grpSpPr>
+      <p:sp>
+        <p:nvSpPr>
+          <p:cNvPr id="2" name="Slide Image Placeholder 1"/>
+          <p:cNvSpPr>
+            <a:spLocks noGrp="1"/>
+          </p:cNvSpPr>
+          <p:nvPr>
+            <p:ph type="sldImg" idx="2"/>
+          </p:nvPr>
+        </p:nvSpPr>
+        <p:spPr/>
+      </p:sp>
+      <p:sp>
+        <p:nvSpPr>
+          <p:cNvPr id="3" name="Notes Placeholder 2"/>
+          <p:cNvSpPr>
+            <a:spLocks noGrp="1"/>
+          </p:cNvSpPr>
+          <p:nvPr>
+            <p:ph type="body" idx="3" sz="quarter"/>
+          </p:nvPr>
+        </p:nvSpPr>
+        <p:spPr/>
+        <p:txBody>
+          <a:bodyPr/>
+          <a:lstStyle/>
+          <a:p>
+            <a:r>
+              <a:t>VO: The Data layer names the domains and their owners. The Person domain — owned by the Identity Authority; everyone else uses the person identity, no one else mints it. The Learner domain — owned by the Learner Registry. Examination results — owned by the Examination Authority. Schools — owned by the Ministry. One domain, one owner, one authoritative copy. The once-only principle now becomes concrete: when the Examination Authority needs to know who a learner is, it consumes the Learner Registry and the Identity Authority — it does not keep its own private copy of the learner that drifts out of date. If you find the Examination Authority maintaining its own learner list, that is a duplicate registry, and you write it down.</a:t>
+            </a:r>
+          </a:p>
+          <a:p/>
+          <a:p>
+            <a:r>
+              <a:t>The duplicate-registry example previews the Assess gaps in 2.6 — name the link.</a:t>
+            </a:r>
+          </a:p>
+        </p:txBody>
+      </p:sp>
+      <p:sp>
+        <p:nvSpPr>
+          <p:cNvPr id="4" name="Slide Number Placeholder 3"/>
+          <p:cNvSpPr>
+            <a:spLocks noGrp="1"/>
+          </p:cNvSpPr>
+          <p:nvPr>
+            <p:ph type="sldNum" idx="5" sz="quarter"/>
+          </p:nvPr>
+        </p:nvSpPr>
+        <p:spPr/>
+      </p:sp>
+    </p:spTree>
+  </p:cSld>
+  <p:clrMapOvr>
+    <a:masterClrMapping/>
+  </p:clrMapOvr>
+</p:notes>
+</file>
+
+<file path=ppt/notesSlides/notesSlide41.xml><?xml version="1.0" encoding="utf-8"?>
+<p:notes xmlns:a="http://schemas.openxmlformats.org/drawingml/2006/main" xmlns:p="http://schemas.openxmlformats.org/presentationml/2006/main" xmlns:r="http://schemas.openxmlformats.org/officeDocument/2006/relationships">
+  <p:cSld>
+    <p:spTree>
+      <p:nvGrpSpPr>
+        <p:cNvPr id="1" name=""/>
+        <p:cNvGrpSpPr/>
+        <p:nvPr/>
+      </p:nvGrpSpPr>
+      <p:grpSpPr>
+        <a:xfrm>
+          <a:off x="0" y="0"/>
+          <a:ext cx="0" cy="0"/>
+          <a:chOff x="0" y="0"/>
+          <a:chExt cx="0" cy="0"/>
+        </a:xfrm>
+      </p:grpSpPr>
+      <p:sp>
+        <p:nvSpPr>
+          <p:cNvPr id="2" name="Slide Image Placeholder 1"/>
+          <p:cNvSpPr>
+            <a:spLocks noGrp="1"/>
+          </p:cNvSpPr>
+          <p:nvPr>
+            <p:ph type="sldImg" idx="2"/>
+          </p:nvPr>
+        </p:nvSpPr>
+        <p:spPr/>
+      </p:sp>
+      <p:sp>
+        <p:nvSpPr>
+          <p:cNvPr id="3" name="Notes Placeholder 2"/>
+          <p:cNvSpPr>
+            <a:spLocks noGrp="1"/>
+          </p:cNvSpPr>
+          <p:nvPr>
+            <p:ph type="body" idx="3" sz="quarter"/>
+          </p:nvPr>
+        </p:nvSpPr>
+        <p:spPr/>
+        <p:txBody>
+          <a:bodyPr/>
+          <a:lstStyle/>
+          <a:p>
+            <a:r>
+              <a:t>VO: The Application layer maps software to those capabilities. An enrolment system supports the register-a-learner capability and uses the Learner and Person domains. An examination-management system supports run-an-examination. An identity-verification service supports prove-identity. Each application points up to a capability and across to the data domains it uses — so you can see, at a glance, which systems would break if the Identity Authority changed, and whether two systems are quietly doing the same job. Underneath, the Technology layer: the shared identity platform, the data-exchange backbone run by the Digital Government Authority, the hosting. A short list of shared standards — not a server audit.</a:t>
+            </a:r>
+          </a:p>
+          <a:p/>
+          <a:p>
+            <a:r>
+              <a:t>Application names stay generic and descriptive — no vendor or product names on screen.</a:t>
+            </a:r>
+          </a:p>
+        </p:txBody>
+      </p:sp>
+      <p:sp>
+        <p:nvSpPr>
+          <p:cNvPr id="4" name="Slide Number Placeholder 3"/>
+          <p:cNvSpPr>
+            <a:spLocks noGrp="1"/>
+          </p:cNvSpPr>
+          <p:nvPr>
+            <p:ph type="sldNum" idx="5" sz="quarter"/>
+          </p:nvPr>
+        </p:nvSpPr>
+        <p:spPr/>
+      </p:sp>
+    </p:spTree>
+  </p:cSld>
+  <p:clrMapOvr>
+    <a:masterClrMapping/>
+  </p:clrMapOvr>
+</p:notes>
+</file>
+
+<file path=ppt/notesSlides/notesSlide42.xml><?xml version="1.0" encoding="utf-8"?>
+<p:notes xmlns:a="http://schemas.openxmlformats.org/drawingml/2006/main" xmlns:p="http://schemas.openxmlformats.org/presentationml/2006/main" xmlns:r="http://schemas.openxmlformats.org/officeDocument/2006/relationships">
+  <p:cSld>
+    <p:spTree>
+      <p:nvGrpSpPr>
+        <p:cNvPr id="1" name=""/>
+        <p:cNvGrpSpPr/>
+        <p:nvPr/>
+      </p:nvGrpSpPr>
+      <p:grpSpPr>
+        <a:xfrm>
+          <a:off x="0" y="0"/>
+          <a:ext cx="0" cy="0"/>
+          <a:chOff x="0" y="0"/>
+          <a:chExt cx="0" cy="0"/>
+        </a:xfrm>
+      </p:grpSpPr>
+      <p:sp>
+        <p:nvSpPr>
+          <p:cNvPr id="2" name="Slide Image Placeholder 1"/>
+          <p:cNvSpPr>
+            <a:spLocks noGrp="1"/>
+          </p:cNvSpPr>
+          <p:nvPr>
+            <p:ph type="sldImg" idx="2"/>
+          </p:nvPr>
+        </p:nvSpPr>
+        <p:spPr/>
+      </p:sp>
+      <p:sp>
+        <p:nvSpPr>
+          <p:cNvPr id="3" name="Notes Placeholder 2"/>
+          <p:cNvSpPr>
+            <a:spLocks noGrp="1"/>
+          </p:cNvSpPr>
+          <p:nvPr>
+            <p:ph type="body" idx="3" sz="quarter"/>
+          </p:nvPr>
+        </p:nvSpPr>
+        <p:spPr/>
+        <p:txBody>
+          <a:bodyPr/>
+          <a:lstStyle/>
+          <a:p>
+            <a:r>
+              <a:t>PRACTICE BOX (on-screen only — never read it, never paraphrase it, never point at it). It replaces the narrated handoff: this video ends on the recap and the Sources slide.</a:t>
+            </a:r>
+          </a:p>
+          <a:p/>
+          <a:p>
+            <a:r>
+              <a:t>VO: Trace one service down. Sit an examination and get a certificate: the Examination Authority's run-an-examination capability, the exam-management application, three data domains — learner, person, result — and the shared data-exchange and identity platforms underneath.</a:t>
+            </a:r>
+          </a:p>
+          <a:p/>
+          <a:p>
+            <a:r>
+              <a:t>Centrepiece and recap of 2.5. Reveal one band at a time, top to bottom, in the order the VO names them.</a:t>
+            </a:r>
+          </a:p>
+        </p:txBody>
+      </p:sp>
+      <p:sp>
+        <p:nvSpPr>
+          <p:cNvPr id="4" name="Slide Number Placeholder 3"/>
+          <p:cNvSpPr>
+            <a:spLocks noGrp="1"/>
+          </p:cNvSpPr>
+          <p:nvPr>
+            <p:ph type="sldNum" idx="5" sz="quarter"/>
+          </p:nvPr>
+        </p:nvSpPr>
+        <p:spPr/>
+      </p:sp>
+    </p:spTree>
+  </p:cSld>
+  <p:clrMapOvr>
+    <a:masterClrMapping/>
+  </p:clrMapOvr>
+</p:notes>
+</file>
+
+<file path=ppt/notesSlides/notesSlide43.xml><?xml version="1.0" encoding="utf-8"?>
 <p:notes xmlns:a="http://schemas.openxmlformats.org/drawingml/2006/main" xmlns:p="http://schemas.openxmlformats.org/presentationml/2006/main" xmlns:r="http://schemas.openxmlformats.org/officeDocument/2006/relationships">
   <p:cSld>
     <p:spTree>
@@ -11620,2477 +11620,6 @@
 </p:sldMaster>
 </file>
 
-<file path=ppt/slides/slide1.xml><?xml version="1.0" encoding="utf-8"?>
-<p:sld xmlns:a="http://schemas.openxmlformats.org/drawingml/2006/main" xmlns:r="http://schemas.openxmlformats.org/officeDocument/2006/relationships" xmlns:p="http://schemas.openxmlformats.org/presentationml/2006/main">
-  <p:cSld>
-    <p:spTree>
-      <p:nvGrpSpPr>
-        <p:cNvPr id="1" name=""/>
-        <p:cNvGrpSpPr/>
-        <p:nvPr/>
-      </p:nvGrpSpPr>
-      <p:grpSpPr>
-        <a:xfrm>
-          <a:off x="0" y="0"/>
-          <a:ext cx="0" cy="0"/>
-          <a:chOff x="0" y="0"/>
-          <a:chExt cx="0" cy="0"/>
-        </a:xfrm>
-      </p:grpSpPr>
-      <p:cxnSp>
-        <p:nvCxnSpPr>
-          <p:cNvPr id="11" name="Straight Connector 10">
-            <a:extLst>
-              <a:ext uri="{FF2B5EF4-FFF2-40B4-BE49-F238E27FC236}">
-                <a16:creationId xmlns:a16="http://schemas.microsoft.com/office/drawing/2014/main" id="{D9AD66F2-F7C0-4D03-9150-D28F17AC561D}"/>
-              </a:ext>
-            </a:extLst>
-          </p:cNvPr>
-          <p:cNvCxnSpPr>
-            <a:cxnSpLocks/>
-          </p:cNvCxnSpPr>
-          <p:nvPr/>
-        </p:nvCxnSpPr>
-        <p:spPr>
-          <a:xfrm>
-            <a:off x="373021" y="2198718"/>
-            <a:ext cx="6843567" cy="0"/>
-          </a:xfrm>
-          <a:prstGeom prst="line">
-            <a:avLst/>
-          </a:prstGeom>
-          <a:ln w="12700">
-            <a:solidFill>
-              <a:srgbClr val="009CD6"/>
-            </a:solidFill>
-          </a:ln>
-        </p:spPr>
-        <p:style>
-          <a:lnRef idx="1">
-            <a:schemeClr val="accent1"/>
-          </a:lnRef>
-          <a:fillRef idx="0">
-            <a:schemeClr val="accent1"/>
-          </a:fillRef>
-          <a:effectRef idx="0">
-            <a:schemeClr val="accent1"/>
-          </a:effectRef>
-          <a:fontRef idx="minor">
-            <a:schemeClr val="tx1"/>
-          </a:fontRef>
-        </p:style>
-      </p:cxnSp>
-      <p:sp>
-        <p:nvSpPr>
-          <p:cNvPr id="12" name="Title 9">
-            <a:extLst>
-              <a:ext uri="{FF2B5EF4-FFF2-40B4-BE49-F238E27FC236}">
-                <a16:creationId xmlns:a16="http://schemas.microsoft.com/office/drawing/2014/main" id="{EEB08032-CE0E-4986-AEDF-A41026C0E8B9}"/>
-              </a:ext>
-            </a:extLst>
-          </p:cNvPr>
-          <p:cNvSpPr txBox="1">
-            <a:spLocks/>
-          </p:cNvSpPr>
-          <p:nvPr/>
-        </p:nvSpPr>
-        <p:spPr>
-          <a:xfrm>
-            <a:off x="237734" y="702833"/>
-            <a:ext cx="6432007" cy="1218817"/>
-          </a:xfrm>
-          <a:prstGeom prst="rect">
-            <a:avLst/>
-          </a:prstGeom>
-        </p:spPr>
-        <p:txBody>
-          <a:bodyPr anchor="b">
-            <a:noAutofit/>
-          </a:bodyPr>
-          <a:lstStyle>
-            <a:lvl1pPr algn="l" defTabSz="914400" rtl="0" eaLnBrk="1" latinLnBrk="0" hangingPunct="1">
-              <a:lnSpc>
-                <a:spcPct val="90000"/>
-              </a:lnSpc>
-              <a:spcBef>
-                <a:spcPct val="0"/>
-              </a:spcBef>
-              <a:buNone/>
-              <a:defRPr sz="4000" kern="1200">
-                <a:solidFill>
-                  <a:schemeClr val="bg1"/>
-                </a:solidFill>
-                <a:latin typeface="Arial" panose="020B0604020202020204" pitchFamily="34" charset="0"/>
-                <a:ea typeface="+mj-ea"/>
-                <a:cs typeface="Arial" panose="020B0604020202020204" pitchFamily="34" charset="0"/>
-              </a:defRPr>
-            </a:lvl1pPr>
-          </a:lstStyle>
-          <a:p>
-            <a:r>
-              <a:rPr sz="2400" b="1" i="0">
-                <a:solidFill>
-                  <a:srgbClr val="1A1A1A"/>
-                </a:solidFill>
-                <a:latin typeface="Arial"/>
-              </a:rPr>
-              <a:t>2.5 — BDAT on a real ministry — the Progressa walkthrough</a:t>
-            </a:r>
-          </a:p>
-        </p:txBody>
-      </p:sp>
-      <p:pic>
-        <p:nvPicPr>
-          <p:cNvPr id="7" name="Picture 6">
-            <a:extLst>
-              <a:ext uri="{FF2B5EF4-FFF2-40B4-BE49-F238E27FC236}">
-                <a16:creationId xmlns:a16="http://schemas.microsoft.com/office/drawing/2014/main" id="{A2066351-C569-4C4C-A096-308777FCDC32}"/>
-              </a:ext>
-            </a:extLst>
-          </p:cNvPr>
-          <p:cNvPicPr>
-            <a:picLocks noChangeAspect="1"/>
-          </p:cNvPicPr>
-          <p:nvPr/>
-        </p:nvPicPr>
-        <p:blipFill>
-          <a:blip r:embed="rId2">
-            <a:extLst>
-              <a:ext uri="{28A0092B-C50C-407E-A947-70E740481C1C}">
-                <a14:useLocalDpi xmlns:a14="http://schemas.microsoft.com/office/drawing/2010/main" val="0"/>
-              </a:ext>
-            </a:extLst>
-          </a:blip>
-          <a:srcRect t="20219" b="14729"/>
-          <a:stretch>
-            <a:fillRect/>
-          </a:stretch>
-        </p:blipFill>
-        <p:spPr>
-          <a:xfrm>
-            <a:off x="0" y="5620871"/>
-            <a:ext cx="1323975" cy="1218816"/>
-          </a:xfrm>
-          <a:prstGeom prst="rect">
-            <a:avLst/>
-          </a:prstGeom>
-        </p:spPr>
-      </p:pic>
-      <p:sp>
-        <p:nvSpPr>
-          <p:cNvPr id="14" name="Title 9">
-            <a:extLst>
-              <a:ext uri="{FF2B5EF4-FFF2-40B4-BE49-F238E27FC236}">
-                <a16:creationId xmlns:a16="http://schemas.microsoft.com/office/drawing/2014/main" id="{B5087B80-3EE4-1881-0130-ED58CA625092}"/>
-              </a:ext>
-            </a:extLst>
-          </p:cNvPr>
-          <p:cNvSpPr txBox="1">
-            <a:spLocks/>
-          </p:cNvSpPr>
-          <p:nvPr/>
-        </p:nvSpPr>
-        <p:spPr>
-          <a:xfrm>
-            <a:off x="284452" y="2475786"/>
-            <a:ext cx="6382893" cy="953213"/>
-          </a:xfrm>
-          <a:prstGeom prst="rect">
-            <a:avLst/>
-          </a:prstGeom>
-        </p:spPr>
-        <p:txBody>
-          <a:bodyPr anchor="t">
-            <a:noAutofit/>
-          </a:bodyPr>
-          <a:lstStyle>
-            <a:lvl1pPr algn="l" defTabSz="914400" rtl="0" eaLnBrk="1" latinLnBrk="0" hangingPunct="1">
-              <a:lnSpc>
-                <a:spcPct val="90000"/>
-              </a:lnSpc>
-              <a:spcBef>
-                <a:spcPct val="0"/>
-              </a:spcBef>
-              <a:buNone/>
-              <a:defRPr sz="4000" kern="1200">
-                <a:solidFill>
-                  <a:schemeClr val="bg1"/>
-                </a:solidFill>
-                <a:latin typeface="Arial" panose="020B0604020202020204" pitchFamily="34" charset="0"/>
-                <a:ea typeface="+mj-ea"/>
-                <a:cs typeface="Arial" panose="020B0604020202020204" pitchFamily="34" charset="0"/>
-              </a:defRPr>
-            </a:lvl1pPr>
-          </a:lstStyle>
-          <a:p>
-            <a:pPr marL="0" marR="0" lvl="0" indent="0" rtl="0">
-              <a:spcBef>
-                <a:spcPts val="600"/>
-              </a:spcBef>
-              <a:spcAft>
-                <a:spcPts val="0"/>
-              </a:spcAft>
-              <a:buNone/>
-            </a:pPr>
-            <a:r>
-              <a:rPr sz="1300" b="1" i="0">
-                <a:solidFill>
-                  <a:srgbClr val="006E96"/>
-                </a:solidFill>
-                <a:latin typeface="Arial"/>
-              </a:rPr>
-              <a:t>KP1 · Government Enterprise Architecture · Module 2 · Video 2.5</a:t>
-            </a:r>
-          </a:p>
-          <a:p>
-            <a:r>
-              <a:rPr sz="1200" b="0" i="1">
-                <a:solidFill>
-                  <a:srgbClr val="595959"/>
-                </a:solidFill>
-                <a:latin typeface="Arial"/>
-              </a:rPr>
-              <a:t>Watch the four layers and the shared entities applied to one real education system — Progressa's ministry, learner registry, examination authority and identity authority — and the abstract method becomes a concrete picture you can reproduce on your own sector.</a:t>
-            </a:r>
-          </a:p>
-        </p:txBody>
-      </p:sp>
-      <p:sp>
-        <p:nvSpPr>
-          <p:cNvPr id="17" name="Title 9">
-            <a:extLst>
-              <a:ext uri="{FF2B5EF4-FFF2-40B4-BE49-F238E27FC236}">
-                <a16:creationId xmlns:a16="http://schemas.microsoft.com/office/drawing/2014/main" id="{5E8796F7-DD26-D250-5E97-B38B22298E72}"/>
-              </a:ext>
-            </a:extLst>
-          </p:cNvPr>
-          <p:cNvSpPr txBox="1">
-            <a:spLocks/>
-          </p:cNvSpPr>
-          <p:nvPr/>
-        </p:nvSpPr>
-        <p:spPr>
-          <a:xfrm>
-            <a:off x="284452" y="4363897"/>
-            <a:ext cx="6382893" cy="953213"/>
-          </a:xfrm>
-          <a:prstGeom prst="rect">
-            <a:avLst/>
-          </a:prstGeom>
-        </p:spPr>
-        <p:txBody>
-          <a:bodyPr anchor="t">
-            <a:noAutofit/>
-          </a:bodyPr>
-          <a:lstStyle>
-            <a:lvl1pPr algn="l" defTabSz="914400" rtl="0" eaLnBrk="1" latinLnBrk="0" hangingPunct="1">
-              <a:lnSpc>
-                <a:spcPct val="90000"/>
-              </a:lnSpc>
-              <a:spcBef>
-                <a:spcPct val="0"/>
-              </a:spcBef>
-              <a:buNone/>
-              <a:defRPr sz="4000" kern="1200">
-                <a:solidFill>
-                  <a:schemeClr val="bg1"/>
-                </a:solidFill>
-                <a:latin typeface="Arial" panose="020B0604020202020204" pitchFamily="34" charset="0"/>
-                <a:ea typeface="+mj-ea"/>
-                <a:cs typeface="Arial" panose="020B0604020202020204" pitchFamily="34" charset="0"/>
-              </a:defRPr>
-            </a:lvl1pPr>
-          </a:lstStyle>
-          <a:p>
-            <a:pPr marL="0" marR="0" lvl="0" indent="0" rtl="0">
-              <a:spcBef>
-                <a:spcPts val="600"/>
-              </a:spcBef>
-              <a:spcAft>
-                <a:spcPts val="1200"/>
-              </a:spcAft>
-              <a:buNone/>
-            </a:pPr>
-            <a:r>
-              <a:rPr sz="1400" b="1" i="0">
-                <a:solidFill>
-                  <a:srgbClr val="1A1A1A"/>
-                </a:solidFill>
-                <a:latin typeface="Arial"/>
-              </a:rPr>
-              <a:t>Target audience: </a:t>
-            </a:r>
-            <a:r>
-              <a:rPr sz="1400" b="0" i="0">
-                <a:solidFill>
-                  <a:srgbClr val="1A1A1A"/>
-                </a:solidFill>
-                <a:latin typeface="Arial"/>
-              </a:rPr>
-              <a:t>Chief architect · senior architect · sector ICT lead</a:t>
-            </a:r>
-          </a:p>
-        </p:txBody>
-      </p:sp>
-      <p:sp>
-        <p:nvSpPr>
-          <p:cNvPr id="18" name="Rectangle 17"/>
-          <p:cNvSpPr/>
-          <p:nvPr/>
-        </p:nvSpPr>
-        <p:spPr>
-          <a:xfrm>
-            <a:off x="7022592" y="0"/>
-            <a:ext cx="5169103" cy="6858000"/>
-          </a:xfrm>
-          <a:prstGeom prst="rect">
-            <a:avLst/>
-          </a:prstGeom>
-          <a:solidFill>
-            <a:srgbClr val="009CD6"/>
-          </a:solidFill>
-          <a:ln>
-            <a:noFill/>
-          </a:ln>
-          <a:effectLst/>
-        </p:spPr>
-        <p:style>
-          <a:lnRef idx="1">
-            <a:schemeClr val="accent1"/>
-          </a:lnRef>
-          <a:fillRef idx="3">
-            <a:schemeClr val="accent1"/>
-          </a:fillRef>
-          <a:effectRef idx="2">
-            <a:schemeClr val="accent1"/>
-          </a:effectRef>
-          <a:fontRef idx="minor">
-            <a:schemeClr val="lt1"/>
-          </a:fontRef>
-        </p:style>
-        <p:txBody>
-          <a:bodyPr rtlCol="0" anchor="ctr"/>
-          <a:lstStyle/>
-          <a:p>
-            <a:pPr algn="ctr"/>
-          </a:p>
-        </p:txBody>
-      </p:sp>
-      <p:sp>
-        <p:nvSpPr>
-          <p:cNvPr id="19" name="TextBox 18"/>
-          <p:cNvSpPr txBox="1"/>
-          <p:nvPr/>
-        </p:nvSpPr>
-        <p:spPr>
-          <a:xfrm>
-            <a:off x="7452360" y="457200"/>
-            <a:ext cx="4297680" cy="457200"/>
-          </a:xfrm>
-          <a:prstGeom prst="rect">
-            <a:avLst/>
-          </a:prstGeom>
-          <a:noFill/>
-        </p:spPr>
-        <p:txBody>
-          <a:bodyPr wrap="square">
-            <a:spAutoFit/>
-          </a:bodyPr>
-          <a:lstStyle/>
-          <a:p>
-            <a:r>
-              <a:rPr sz="1100" b="1" i="0">
-                <a:solidFill>
-                  <a:srgbClr val="E5F5FB"/>
-                </a:solidFill>
-                <a:latin typeface="Arial"/>
-              </a:rPr>
-              <a:t>THE FOUR LAYERS THIS MODULE TEACHES</a:t>
-            </a:r>
-          </a:p>
-        </p:txBody>
-      </p:sp>
-      <p:sp>
-        <p:nvSpPr>
-          <p:cNvPr id="20" name="Rounded Rectangle 19"/>
-          <p:cNvSpPr/>
-          <p:nvPr/>
-        </p:nvSpPr>
-        <p:spPr>
-          <a:xfrm>
-            <a:off x="7452360" y="960120"/>
-            <a:ext cx="3840480" cy="658368"/>
-          </a:xfrm>
-          <a:prstGeom prst="roundRect">
-            <a:avLst>
-              <a:gd name="adj" fmla="val 14000"/>
-            </a:avLst>
-          </a:prstGeom>
-          <a:solidFill>
-            <a:srgbClr val="FFFFFF"/>
-          </a:solidFill>
-          <a:ln>
-            <a:noFill/>
-          </a:ln>
-          <a:effectLst/>
-        </p:spPr>
-        <p:style>
-          <a:lnRef idx="1">
-            <a:schemeClr val="accent1"/>
-          </a:lnRef>
-          <a:fillRef idx="3">
-            <a:schemeClr val="accent1"/>
-          </a:fillRef>
-          <a:effectRef idx="2">
-            <a:schemeClr val="accent1"/>
-          </a:effectRef>
-          <a:fontRef idx="minor">
-            <a:schemeClr val="lt1"/>
-          </a:fontRef>
-        </p:style>
-        <p:txBody>
-          <a:bodyPr rtlCol="0" anchor="ctr" lIns="164592" wrap="square"/>
-          <a:lstStyle/>
-          <a:p>
-            <a:pPr algn="ctr"/>
-            <a:r>
-              <a:rPr sz="1500" b="1" i="0">
-                <a:solidFill>
-                  <a:srgbClr val="1A1A1A"/>
-                </a:solidFill>
-                <a:latin typeface="Arial"/>
-              </a:rPr>
-              <a:t>Business — what the body does</a:t>
-            </a:r>
-          </a:p>
-        </p:txBody>
-      </p:sp>
-      <p:sp>
-        <p:nvSpPr>
-          <p:cNvPr id="21" name="Rounded Rectangle 20"/>
-          <p:cNvSpPr/>
-          <p:nvPr/>
-        </p:nvSpPr>
-        <p:spPr>
-          <a:xfrm>
-            <a:off x="7452360" y="1892808"/>
-            <a:ext cx="3840480" cy="658368"/>
-          </a:xfrm>
-          <a:prstGeom prst="roundRect">
-            <a:avLst>
-              <a:gd name="adj" fmla="val 14000"/>
-            </a:avLst>
-          </a:prstGeom>
-          <a:solidFill>
-            <a:srgbClr val="FFFFFF"/>
-          </a:solidFill>
-          <a:ln>
-            <a:noFill/>
-          </a:ln>
-          <a:effectLst/>
-        </p:spPr>
-        <p:style>
-          <a:lnRef idx="1">
-            <a:schemeClr val="accent1"/>
-          </a:lnRef>
-          <a:fillRef idx="3">
-            <a:schemeClr val="accent1"/>
-          </a:fillRef>
-          <a:effectRef idx="2">
-            <a:schemeClr val="accent1"/>
-          </a:effectRef>
-          <a:fontRef idx="minor">
-            <a:schemeClr val="lt1"/>
-          </a:fontRef>
-        </p:style>
-        <p:txBody>
-          <a:bodyPr rtlCol="0" anchor="ctr" lIns="164592" wrap="square"/>
-          <a:lstStyle/>
-          <a:p>
-            <a:pPr algn="ctr"/>
-            <a:r>
-              <a:rPr sz="1500" b="1" i="0">
-                <a:solidFill>
-                  <a:srgbClr val="1A1A1A"/>
-                </a:solidFill>
-                <a:latin typeface="Arial"/>
-              </a:rPr>
-              <a:t>Data — what it holds, who owns it</a:t>
-            </a:r>
-          </a:p>
-        </p:txBody>
-      </p:sp>
-      <p:sp>
-        <p:nvSpPr>
-          <p:cNvPr id="22" name="Rounded Rectangle 21"/>
-          <p:cNvSpPr/>
-          <p:nvPr/>
-        </p:nvSpPr>
-        <p:spPr>
-          <a:xfrm>
-            <a:off x="7452360" y="2825496"/>
-            <a:ext cx="3840480" cy="658368"/>
-          </a:xfrm>
-          <a:prstGeom prst="roundRect">
-            <a:avLst>
-              <a:gd name="adj" fmla="val 14000"/>
-            </a:avLst>
-          </a:prstGeom>
-          <a:solidFill>
-            <a:srgbClr val="FFFFFF"/>
-          </a:solidFill>
-          <a:ln>
-            <a:noFill/>
-          </a:ln>
-          <a:effectLst/>
-        </p:spPr>
-        <p:style>
-          <a:lnRef idx="1">
-            <a:schemeClr val="accent1"/>
-          </a:lnRef>
-          <a:fillRef idx="3">
-            <a:schemeClr val="accent1"/>
-          </a:fillRef>
-          <a:effectRef idx="2">
-            <a:schemeClr val="accent1"/>
-          </a:effectRef>
-          <a:fontRef idx="minor">
-            <a:schemeClr val="lt1"/>
-          </a:fontRef>
-        </p:style>
-        <p:txBody>
-          <a:bodyPr rtlCol="0" anchor="ctr" lIns="164592" wrap="square"/>
-          <a:lstStyle/>
-          <a:p>
-            <a:pPr algn="ctr"/>
-            <a:r>
-              <a:rPr sz="1500" b="1" i="0">
-                <a:solidFill>
-                  <a:srgbClr val="1A1A1A"/>
-                </a:solidFill>
-                <a:latin typeface="Arial"/>
-              </a:rPr>
-              <a:t>Application — what supports the work</a:t>
-            </a:r>
-          </a:p>
-        </p:txBody>
-      </p:sp>
-      <p:sp>
-        <p:nvSpPr>
-          <p:cNvPr id="23" name="Rounded Rectangle 22"/>
-          <p:cNvSpPr/>
-          <p:nvPr/>
-        </p:nvSpPr>
-        <p:spPr>
-          <a:xfrm>
-            <a:off x="7452360" y="3758184"/>
-            <a:ext cx="3840480" cy="658368"/>
-          </a:xfrm>
-          <a:prstGeom prst="roundRect">
-            <a:avLst>
-              <a:gd name="adj" fmla="val 14000"/>
-            </a:avLst>
-          </a:prstGeom>
-          <a:solidFill>
-            <a:srgbClr val="006E96"/>
-          </a:solidFill>
-          <a:ln>
-            <a:noFill/>
-          </a:ln>
-          <a:effectLst/>
-        </p:spPr>
-        <p:style>
-          <a:lnRef idx="1">
-            <a:schemeClr val="accent1"/>
-          </a:lnRef>
-          <a:fillRef idx="3">
-            <a:schemeClr val="accent1"/>
-          </a:fillRef>
-          <a:effectRef idx="2">
-            <a:schemeClr val="accent1"/>
-          </a:effectRef>
-          <a:fontRef idx="minor">
-            <a:schemeClr val="lt1"/>
-          </a:fontRef>
-        </p:style>
-        <p:txBody>
-          <a:bodyPr rtlCol="0" anchor="ctr" lIns="164592" wrap="square"/>
-          <a:lstStyle/>
-          <a:p>
-            <a:pPr algn="ctr"/>
-            <a:r>
-              <a:rPr sz="1500" b="1" i="0">
-                <a:solidFill>
-                  <a:srgbClr val="FFFFFF"/>
-                </a:solidFill>
-                <a:latin typeface="Arial"/>
-              </a:rPr>
-              <a:t>Technology — what it all runs on</a:t>
-            </a:r>
-          </a:p>
-        </p:txBody>
-      </p:sp>
-      <p:sp>
-        <p:nvSpPr>
-          <p:cNvPr id="24" name="TextBox 23"/>
-          <p:cNvSpPr txBox="1"/>
-          <p:nvPr/>
-        </p:nvSpPr>
-        <p:spPr>
-          <a:xfrm>
-            <a:off x="7452360" y="5806440"/>
-            <a:ext cx="4297680" cy="731520"/>
-          </a:xfrm>
-          <a:prstGeom prst="rect">
-            <a:avLst/>
-          </a:prstGeom>
-          <a:noFill/>
-        </p:spPr>
-        <p:txBody>
-          <a:bodyPr wrap="square">
-            <a:spAutoFit/>
-          </a:bodyPr>
-          <a:lstStyle/>
-          <a:p>
-            <a:r>
-              <a:rPr sz="1200" b="0" i="0">
-                <a:solidFill>
-                  <a:srgbClr val="FFFFFF"/>
-                </a:solidFill>
-                <a:latin typeface="Arial"/>
-              </a:rPr>
-              <a:t>6 shared entities · 10 principles to adopt · 2 traps to catch at Assess</a:t>
-            </a:r>
-          </a:p>
-        </p:txBody>
-      </p:sp>
-    </p:spTree>
-    <p:extLst>
-      <p:ext uri="{BB962C8B-B14F-4D97-AF65-F5344CB8AC3E}">
-        <p14:creationId xmlns:p14="http://schemas.microsoft.com/office/powerpoint/2010/main" val="1196800265"/>
-      </p:ext>
-    </p:extLst>
-  </p:cSld>
-  <p:clrMapOvr>
-    <a:masterClrMapping/>
-  </p:clrMapOvr>
-</p:sld>
-</file>
-
-<file path=ppt/slides/slide32.xml><?xml version="1.0" encoding="utf-8"?>
-<p:sld xmlns:a="http://schemas.openxmlformats.org/drawingml/2006/main" xmlns:p="http://schemas.openxmlformats.org/presentationml/2006/main" xmlns:r="http://schemas.openxmlformats.org/officeDocument/2006/relationships">
-  <p:cSld>
-    <p:spTree>
-      <p:nvGrpSpPr>
-        <p:cNvPr id="1" name=""/>
-        <p:cNvGrpSpPr/>
-        <p:nvPr/>
-      </p:nvGrpSpPr>
-      <p:grpSpPr/>
-      <p:sp>
-        <p:nvSpPr>
-          <p:cNvPr id="2" name="TextBox 1"/>
-          <p:cNvSpPr txBox="1"/>
-          <p:nvPr/>
-        </p:nvSpPr>
-        <p:spPr>
-          <a:xfrm>
-            <a:off x="822960" y="822960"/>
-            <a:ext cx="7315200" cy="457200"/>
-          </a:xfrm>
-          <a:prstGeom prst="rect">
-            <a:avLst/>
-          </a:prstGeom>
-          <a:noFill/>
-        </p:spPr>
-        <p:txBody>
-          <a:bodyPr wrap="square">
-            <a:spAutoFit/>
-          </a:bodyPr>
-          <a:lstStyle/>
-          <a:p>
-            <a:r>
-              <a:rPr sz="1200" b="1" i="0">
-                <a:solidFill>
-                  <a:srgbClr val="595959"/>
-                </a:solidFill>
-                <a:latin typeface="Arial"/>
-              </a:rPr>
-              <a:t>KP1 · MODULE 2 · VIDEO 2.5</a:t>
-            </a:r>
-          </a:p>
-        </p:txBody>
-      </p:sp>
-      <p:sp>
-        <p:nvSpPr>
-          <p:cNvPr id="3" name="TextBox 2"/>
-          <p:cNvSpPr txBox="1"/>
-          <p:nvPr/>
-        </p:nvSpPr>
-        <p:spPr>
-          <a:xfrm>
-            <a:off x="822960" y="1828800"/>
-            <a:ext cx="2011680" cy="1097280"/>
-          </a:xfrm>
-          <a:prstGeom prst="rect">
-            <a:avLst/>
-          </a:prstGeom>
-          <a:noFill/>
-        </p:spPr>
-        <p:txBody>
-          <a:bodyPr wrap="square">
-            <a:spAutoFit/>
-          </a:bodyPr>
-          <a:lstStyle/>
-          <a:p>
-            <a:r>
-              <a:rPr sz="6000" b="1" i="0">
-                <a:solidFill>
-                  <a:srgbClr val="009CD6"/>
-                </a:solidFill>
-                <a:latin typeface="Arial"/>
-              </a:rPr>
-              <a:t>2.5</a:t>
-            </a:r>
-          </a:p>
-        </p:txBody>
-      </p:sp>
-      <p:sp>
-        <p:nvSpPr>
-          <p:cNvPr id="4" name="TextBox 3"/>
-          <p:cNvSpPr txBox="1"/>
-          <p:nvPr/>
-        </p:nvSpPr>
-        <p:spPr>
-          <a:xfrm>
-            <a:off x="822960" y="2880360"/>
-            <a:ext cx="9601200" cy="1371600"/>
-          </a:xfrm>
-          <a:prstGeom prst="rect">
-            <a:avLst/>
-          </a:prstGeom>
-          <a:noFill/>
-        </p:spPr>
-        <p:txBody>
-          <a:bodyPr wrap="square">
-            <a:spAutoFit/>
-          </a:bodyPr>
-          <a:lstStyle/>
-          <a:p>
-            <a:r>
-              <a:rPr sz="3400" b="1" i="0">
-                <a:solidFill>
-                  <a:srgbClr val="1A1A1A"/>
-                </a:solidFill>
-                <a:latin typeface="Arial"/>
-              </a:rPr>
-              <a:t>BDAT on a real ministry — the Progressa walkthrough</a:t>
-            </a:r>
-          </a:p>
-        </p:txBody>
-      </p:sp>
-      <p:sp>
-        <p:nvSpPr>
-          <p:cNvPr id="5" name="TextBox 4"/>
-          <p:cNvSpPr txBox="1"/>
-          <p:nvPr/>
-        </p:nvSpPr>
-        <p:spPr>
-          <a:xfrm>
-            <a:off x="822960" y="4343400"/>
-            <a:ext cx="9875520" cy="1554480"/>
-          </a:xfrm>
-          <a:prstGeom prst="rect">
-            <a:avLst/>
-          </a:prstGeom>
-          <a:noFill/>
-        </p:spPr>
-        <p:txBody>
-          <a:bodyPr wrap="square">
-            <a:spAutoFit/>
-          </a:bodyPr>
-          <a:lstStyle/>
-          <a:p>
-            <a:r>
-              <a:rPr sz="1700" b="0" i="1">
-                <a:solidFill>
-                  <a:srgbClr val="595959"/>
-                </a:solidFill>
-                <a:latin typeface="Arial"/>
-              </a:rPr>
-              <a:t>Watch the four layers and the shared entities applied to one real education system — Progressa's ministry, learner registry, examination authority and identity authority — and the abstract method becomes a concrete picture you can reproduce on your own sector.</a:t>
-            </a:r>
-          </a:p>
-        </p:txBody>
-      </p:sp>
-      <p:sp>
-        <p:nvSpPr>
-          <p:cNvPr id="6" name="TextBox 5"/>
-          <p:cNvSpPr txBox="1"/>
-          <p:nvPr/>
-        </p:nvSpPr>
-        <p:spPr>
-          <a:xfrm>
-            <a:off x="822960" y="5989320"/>
-            <a:ext cx="7315200" cy="365760"/>
-          </a:xfrm>
-          <a:prstGeom prst="rect">
-            <a:avLst/>
-          </a:prstGeom>
-          <a:noFill/>
-        </p:spPr>
-        <p:txBody>
-          <a:bodyPr wrap="square">
-            <a:spAutoFit/>
-          </a:bodyPr>
-          <a:lstStyle/>
-          <a:p>
-            <a:r>
-              <a:rPr sz="1200" b="0" i="0">
-                <a:solidFill>
-                  <a:srgbClr val="595959"/>
-                </a:solidFill>
-                <a:latin typeface="Arial"/>
-              </a:rPr>
-              <a:t>~5 minutes · standalone video · voice-over on text slides</a:t>
-            </a:r>
-          </a:p>
-        </p:txBody>
-      </p:sp>
-    </p:spTree>
-  </p:cSld>
-  <p:clrMapOvr>
-    <a:masterClrMapping/>
-  </p:clrMapOvr>
-</p:sld>
-</file>
-
-<file path=ppt/slides/slide33.xml><?xml version="1.0" encoding="utf-8"?>
-<p:sld xmlns:a="http://schemas.openxmlformats.org/drawingml/2006/main" xmlns:p="http://schemas.openxmlformats.org/presentationml/2006/main" xmlns:r="http://schemas.openxmlformats.org/officeDocument/2006/relationships">
-  <p:cSld>
-    <p:spTree>
-      <p:nvGrpSpPr>
-        <p:cNvPr id="1" name=""/>
-        <p:cNvGrpSpPr/>
-        <p:nvPr/>
-      </p:nvGrpSpPr>
-      <p:grpSpPr/>
-      <p:sp>
-        <p:nvSpPr>
-          <p:cNvPr id="2" name="Rectangle 1"/>
-          <p:cNvSpPr/>
-          <p:nvPr/>
-        </p:nvSpPr>
-        <p:spPr>
-          <a:xfrm>
-            <a:off x="457200" y="384048"/>
-            <a:ext cx="45720" cy="256032"/>
-          </a:xfrm>
-          <a:prstGeom prst="rect">
-            <a:avLst/>
-          </a:prstGeom>
-          <a:solidFill>
-            <a:srgbClr val="009CD6"/>
-          </a:solidFill>
-          <a:ln>
-            <a:noFill/>
-          </a:ln>
-          <a:effectLst/>
-        </p:spPr>
-        <p:style>
-          <a:lnRef idx="1">
-            <a:schemeClr val="accent1"/>
-          </a:lnRef>
-          <a:fillRef idx="3">
-            <a:schemeClr val="accent1"/>
-          </a:fillRef>
-          <a:effectRef idx="2">
-            <a:schemeClr val="accent1"/>
-          </a:effectRef>
-          <a:fontRef idx="minor">
-            <a:schemeClr val="lt1"/>
-          </a:fontRef>
-        </p:style>
-        <p:txBody>
-          <a:bodyPr rtlCol="0" anchor="ctr"/>
-          <a:lstStyle/>
-          <a:p>
-            <a:pPr algn="ctr"/>
-          </a:p>
-        </p:txBody>
-      </p:sp>
-      <p:sp>
-        <p:nvSpPr>
-          <p:cNvPr id="3" name="TextBox 2"/>
-          <p:cNvSpPr txBox="1"/>
-          <p:nvPr/>
-        </p:nvSpPr>
-        <p:spPr>
-          <a:xfrm>
-            <a:off x="621792" y="274320"/>
-            <a:ext cx="11247120" cy="914400"/>
-          </a:xfrm>
-          <a:prstGeom prst="rect">
-            <a:avLst/>
-          </a:prstGeom>
-          <a:noFill/>
-        </p:spPr>
-        <p:txBody>
-          <a:bodyPr wrap="square">
-            <a:spAutoFit/>
-          </a:bodyPr>
-          <a:lstStyle/>
-          <a:p>
-            <a:r>
-              <a:rPr sz="2800" b="1" i="0">
-                <a:solidFill>
-                  <a:srgbClr val="1A1A1A"/>
-                </a:solidFill>
-                <a:latin typeface="Arial"/>
-              </a:rPr>
-              <a:t>Classify the bodies first — that is where the head start comes from</a:t>
-            </a:r>
-          </a:p>
-        </p:txBody>
-      </p:sp>
-      <p:sp>
-        <p:nvSpPr>
-          <p:cNvPr id="4" name="TextBox 3"/>
-          <p:cNvSpPr txBox="1"/>
-          <p:nvPr/>
-        </p:nvSpPr>
-        <p:spPr>
-          <a:xfrm>
-            <a:off x="658368" y="1417320"/>
-            <a:ext cx="10984687" cy="923544"/>
-          </a:xfrm>
-          <a:prstGeom prst="rect">
-            <a:avLst/>
-          </a:prstGeom>
-          <a:noFill/>
-        </p:spPr>
-        <p:txBody>
-          <a:bodyPr wrap="square">
-            <a:spAutoFit/>
-          </a:bodyPr>
-          <a:lstStyle/>
-          <a:p>
-            <a:pPr>
-              <a:spcAft>
-                <a:spcPts val="300"/>
-              </a:spcAft>
-            </a:pPr>
-            <a:r>
-              <a:rPr sz="1700" b="1" i="0">
-                <a:solidFill>
-                  <a:srgbClr val="1A1A1A"/>
-                </a:solidFill>
-                <a:latin typeface="Arial"/>
-              </a:rPr>
-              <a:t>Ministry of Education, Youth and Sport (MoEYS)</a:t>
-            </a:r>
-          </a:p>
-          <a:p>
-            <a:pPr>
-              <a:spcAft>
-                <a:spcPts val="300"/>
-              </a:spcAft>
-            </a:pPr>
-            <a:r>
-              <a:rPr sz="1450" b="0" i="0">
-                <a:solidFill>
-                  <a:srgbClr val="595959"/>
-                </a:solidFill>
-                <a:latin typeface="Arial"/>
-              </a:rPr>
-              <a:t>Policy unit — sets education policy, owns the rules.</a:t>
-            </a:r>
-          </a:p>
-        </p:txBody>
-      </p:sp>
-      <p:sp>
-        <p:nvSpPr>
-          <p:cNvPr id="5" name="Rectangle 4"/>
-          <p:cNvSpPr/>
-          <p:nvPr/>
-        </p:nvSpPr>
-        <p:spPr>
-          <a:xfrm>
-            <a:off x="621792" y="2345436"/>
-            <a:ext cx="10881360" cy="12700"/>
-          </a:xfrm>
-          <a:prstGeom prst="rect">
-            <a:avLst/>
-          </a:prstGeom>
-          <a:solidFill>
-            <a:srgbClr val="DDECF4"/>
-          </a:solidFill>
-          <a:ln>
-            <a:noFill/>
-          </a:ln>
-          <a:effectLst/>
-        </p:spPr>
-        <p:style>
-          <a:lnRef idx="1">
-            <a:schemeClr val="accent1"/>
-          </a:lnRef>
-          <a:fillRef idx="3">
-            <a:schemeClr val="accent1"/>
-          </a:fillRef>
-          <a:effectRef idx="2">
-            <a:schemeClr val="accent1"/>
-          </a:effectRef>
-          <a:fontRef idx="minor">
-            <a:schemeClr val="lt1"/>
-          </a:fontRef>
-        </p:style>
-        <p:txBody>
-          <a:bodyPr rtlCol="0" anchor="ctr"/>
-          <a:lstStyle/>
-          <a:p>
-            <a:pPr algn="ctr"/>
-          </a:p>
-        </p:txBody>
-      </p:sp>
-      <p:sp>
-        <p:nvSpPr>
-          <p:cNvPr id="6" name="TextBox 5"/>
-          <p:cNvSpPr txBox="1"/>
-          <p:nvPr/>
-        </p:nvSpPr>
-        <p:spPr>
-          <a:xfrm>
-            <a:off x="658368" y="2386584"/>
-            <a:ext cx="10984687" cy="923544"/>
-          </a:xfrm>
-          <a:prstGeom prst="rect">
-            <a:avLst/>
-          </a:prstGeom>
-          <a:noFill/>
-        </p:spPr>
-        <p:txBody>
-          <a:bodyPr wrap="square">
-            <a:spAutoFit/>
-          </a:bodyPr>
-          <a:lstStyle/>
-          <a:p>
-            <a:pPr>
-              <a:spcAft>
-                <a:spcPts val="300"/>
-              </a:spcAft>
-            </a:pPr>
-            <a:r>
-              <a:rPr sz="1700" b="1" i="0">
-                <a:solidFill>
-                  <a:srgbClr val="1A1A1A"/>
-                </a:solidFill>
-                <a:latin typeface="Arial"/>
-              </a:rPr>
-              <a:t>National Examination Authority (PNEA)</a:t>
-            </a:r>
-          </a:p>
-          <a:p>
-            <a:pPr>
-              <a:spcAft>
-                <a:spcPts val="300"/>
-              </a:spcAft>
-            </a:pPr>
-            <a:r>
-              <a:rPr sz="1450" b="0" i="0">
-                <a:solidFill>
-                  <a:srgbClr val="595959"/>
-                </a:solidFill>
-                <a:latin typeface="Arial"/>
-              </a:rPr>
-              <a:t>Service-delivery authority with a regulatory edge — runs examinations at scale, certifies results.</a:t>
-            </a:r>
-          </a:p>
-        </p:txBody>
-      </p:sp>
-      <p:sp>
-        <p:nvSpPr>
-          <p:cNvPr id="7" name="Rectangle 6"/>
-          <p:cNvSpPr/>
-          <p:nvPr/>
-        </p:nvSpPr>
-        <p:spPr>
-          <a:xfrm>
-            <a:off x="621792" y="3314700"/>
-            <a:ext cx="10881360" cy="12700"/>
-          </a:xfrm>
-          <a:prstGeom prst="rect">
-            <a:avLst/>
-          </a:prstGeom>
-          <a:solidFill>
-            <a:srgbClr val="DDECF4"/>
-          </a:solidFill>
-          <a:ln>
-            <a:noFill/>
-          </a:ln>
-          <a:effectLst/>
-        </p:spPr>
-        <p:style>
-          <a:lnRef idx="1">
-            <a:schemeClr val="accent1"/>
-          </a:lnRef>
-          <a:fillRef idx="3">
-            <a:schemeClr val="accent1"/>
-          </a:fillRef>
-          <a:effectRef idx="2">
-            <a:schemeClr val="accent1"/>
-          </a:effectRef>
-          <a:fontRef idx="minor">
-            <a:schemeClr val="lt1"/>
-          </a:fontRef>
-        </p:style>
-        <p:txBody>
-          <a:bodyPr rtlCol="0" anchor="ctr"/>
-          <a:lstStyle/>
-          <a:p>
-            <a:pPr algn="ctr"/>
-          </a:p>
-        </p:txBody>
-      </p:sp>
-      <p:sp>
-        <p:nvSpPr>
-          <p:cNvPr id="8" name="TextBox 7"/>
-          <p:cNvSpPr txBox="1"/>
-          <p:nvPr/>
-        </p:nvSpPr>
-        <p:spPr>
-          <a:xfrm>
-            <a:off x="658368" y="3355848"/>
-            <a:ext cx="10984687" cy="923544"/>
-          </a:xfrm>
-          <a:prstGeom prst="rect">
-            <a:avLst/>
-          </a:prstGeom>
-          <a:noFill/>
-        </p:spPr>
-        <p:txBody>
-          <a:bodyPr wrap="square">
-            <a:spAutoFit/>
-          </a:bodyPr>
-          <a:lstStyle/>
-          <a:p>
-            <a:pPr>
-              <a:spcAft>
-                <a:spcPts val="300"/>
-              </a:spcAft>
-            </a:pPr>
-            <a:r>
-              <a:rPr sz="1700" b="1" i="0">
-                <a:solidFill>
-                  <a:srgbClr val="1A1A1A"/>
-                </a:solidFill>
-                <a:latin typeface="Arial"/>
-              </a:rPr>
-              <a:t>Learner Registry (PLR)</a:t>
-            </a:r>
-          </a:p>
-          <a:p>
-            <a:pPr>
-              <a:spcAft>
-                <a:spcPts val="300"/>
-              </a:spcAft>
-            </a:pPr>
-            <a:r>
-              <a:rPr sz="1450" b="0" i="0">
-                <a:solidFill>
-                  <a:srgbClr val="595959"/>
-                </a:solidFill>
-                <a:latin typeface="Arial"/>
-              </a:rPr>
-              <a:t>State registry — the authoritative single source for who is a learner.</a:t>
-            </a:r>
-          </a:p>
-        </p:txBody>
-      </p:sp>
-      <p:sp>
-        <p:nvSpPr>
-          <p:cNvPr id="9" name="Rectangle 8"/>
-          <p:cNvSpPr/>
-          <p:nvPr/>
-        </p:nvSpPr>
-        <p:spPr>
-          <a:xfrm>
-            <a:off x="621792" y="4283964"/>
-            <a:ext cx="10881360" cy="12700"/>
-          </a:xfrm>
-          <a:prstGeom prst="rect">
-            <a:avLst/>
-          </a:prstGeom>
-          <a:solidFill>
-            <a:srgbClr val="DDECF4"/>
-          </a:solidFill>
-          <a:ln>
-            <a:noFill/>
-          </a:ln>
-          <a:effectLst/>
-        </p:spPr>
-        <p:style>
-          <a:lnRef idx="1">
-            <a:schemeClr val="accent1"/>
-          </a:lnRef>
-          <a:fillRef idx="3">
-            <a:schemeClr val="accent1"/>
-          </a:fillRef>
-          <a:effectRef idx="2">
-            <a:schemeClr val="accent1"/>
-          </a:effectRef>
-          <a:fontRef idx="minor">
-            <a:schemeClr val="lt1"/>
-          </a:fontRef>
-        </p:style>
-        <p:txBody>
-          <a:bodyPr rtlCol="0" anchor="ctr"/>
-          <a:lstStyle/>
-          <a:p>
-            <a:pPr algn="ctr"/>
-          </a:p>
-        </p:txBody>
-      </p:sp>
-      <p:sp>
-        <p:nvSpPr>
-          <p:cNvPr id="10" name="TextBox 9"/>
-          <p:cNvSpPr txBox="1"/>
-          <p:nvPr/>
-        </p:nvSpPr>
-        <p:spPr>
-          <a:xfrm>
-            <a:off x="658368" y="4325112"/>
-            <a:ext cx="10984687" cy="923544"/>
-          </a:xfrm>
-          <a:prstGeom prst="rect">
-            <a:avLst/>
-          </a:prstGeom>
-          <a:noFill/>
-        </p:spPr>
-        <p:txBody>
-          <a:bodyPr wrap="square">
-            <a:spAutoFit/>
-          </a:bodyPr>
-          <a:lstStyle/>
-          <a:p>
-            <a:pPr>
-              <a:spcAft>
-                <a:spcPts val="300"/>
-              </a:spcAft>
-            </a:pPr>
-            <a:r>
-              <a:rPr sz="1700" b="1" i="0">
-                <a:solidFill>
-                  <a:srgbClr val="1A1A1A"/>
-                </a:solidFill>
-                <a:latin typeface="Arial"/>
-              </a:rPr>
-              <a:t>National Identity Authority (PNIA)</a:t>
-            </a:r>
-          </a:p>
-          <a:p>
-            <a:pPr>
-              <a:spcAft>
-                <a:spcPts val="300"/>
-              </a:spcAft>
-            </a:pPr>
-            <a:r>
-              <a:rPr sz="1450" b="0" i="0">
-                <a:solidFill>
-                  <a:srgbClr val="595959"/>
-                </a:solidFill>
-                <a:latin typeface="Arial"/>
-              </a:rPr>
-              <a:t>State registry and shared platform — owns the person identity every sector reuses.</a:t>
-            </a:r>
-          </a:p>
-        </p:txBody>
-      </p:sp>
-      <p:sp>
-        <p:nvSpPr>
-          <p:cNvPr id="11" name="Rectangle 10"/>
-          <p:cNvSpPr/>
-          <p:nvPr/>
-        </p:nvSpPr>
-        <p:spPr>
-          <a:xfrm>
-            <a:off x="621792" y="5253228"/>
-            <a:ext cx="10881360" cy="12700"/>
-          </a:xfrm>
-          <a:prstGeom prst="rect">
-            <a:avLst/>
-          </a:prstGeom>
-          <a:solidFill>
-            <a:srgbClr val="DDECF4"/>
-          </a:solidFill>
-          <a:ln>
-            <a:noFill/>
-          </a:ln>
-          <a:effectLst/>
-        </p:spPr>
-        <p:style>
-          <a:lnRef idx="1">
-            <a:schemeClr val="accent1"/>
-          </a:lnRef>
-          <a:fillRef idx="3">
-            <a:schemeClr val="accent1"/>
-          </a:fillRef>
-          <a:effectRef idx="2">
-            <a:schemeClr val="accent1"/>
-          </a:effectRef>
-          <a:fontRef idx="minor">
-            <a:schemeClr val="lt1"/>
-          </a:fontRef>
-        </p:style>
-        <p:txBody>
-          <a:bodyPr rtlCol="0" anchor="ctr"/>
-          <a:lstStyle/>
-          <a:p>
-            <a:pPr algn="ctr"/>
-          </a:p>
-        </p:txBody>
-      </p:sp>
-      <p:sp>
-        <p:nvSpPr>
-          <p:cNvPr id="12" name="TextBox 11"/>
-          <p:cNvSpPr txBox="1"/>
-          <p:nvPr/>
-        </p:nvSpPr>
-        <p:spPr>
-          <a:xfrm>
-            <a:off x="658368" y="5294376"/>
-            <a:ext cx="10984687" cy="923544"/>
-          </a:xfrm>
-          <a:prstGeom prst="rect">
-            <a:avLst/>
-          </a:prstGeom>
-          <a:noFill/>
-        </p:spPr>
-        <p:txBody>
-          <a:bodyPr wrap="square">
-            <a:spAutoFit/>
-          </a:bodyPr>
-          <a:lstStyle/>
-          <a:p>
-            <a:pPr>
-              <a:spcAft>
-                <a:spcPts val="300"/>
-              </a:spcAft>
-            </a:pPr>
-            <a:r>
-              <a:rPr sz="1700" b="1" i="0">
-                <a:solidFill>
-                  <a:srgbClr val="1A1A1A"/>
-                </a:solidFill>
-                <a:latin typeface="Arial"/>
-              </a:rPr>
-              <a:t>Digital Government Authority (PDGA)</a:t>
-            </a:r>
-          </a:p>
-          <a:p>
-            <a:pPr>
-              <a:spcAft>
-                <a:spcPts val="300"/>
-              </a:spcAft>
-            </a:pPr>
-            <a:r>
-              <a:rPr sz="1450" b="0" i="0">
-                <a:solidFill>
-                  <a:srgbClr val="595959"/>
-                </a:solidFill>
-                <a:latin typeface="Arial"/>
-              </a:rPr>
-              <a:t>Shared-platform provider — data exchange and payments.</a:t>
-            </a:r>
-          </a:p>
-        </p:txBody>
-      </p:sp>
-      <p:sp>
-        <p:nvSpPr>
-          <p:cNvPr id="13" name="TextBox 12"/>
-          <p:cNvSpPr txBox="1"/>
-          <p:nvPr/>
-        </p:nvSpPr>
-        <p:spPr>
-          <a:xfrm>
-            <a:off x="457200" y="6473952"/>
-            <a:ext cx="7772400" cy="292608"/>
-          </a:xfrm>
-          <a:prstGeom prst="rect">
-            <a:avLst/>
-          </a:prstGeom>
-          <a:noFill/>
-        </p:spPr>
-        <p:txBody>
-          <a:bodyPr wrap="square">
-            <a:spAutoFit/>
-          </a:bodyPr>
-          <a:lstStyle/>
-          <a:p>
-            <a:r>
-              <a:rPr sz="900" b="0" i="0">
-                <a:solidFill>
-                  <a:srgbClr val="595959"/>
-                </a:solidFill>
-                <a:latin typeface="Arial"/>
-              </a:rPr>
-              <a:t>2.5 · BDAT on a real ministry — the Progressa walkthrough</a:t>
-            </a:r>
-          </a:p>
-        </p:txBody>
-      </p:sp>
-    </p:spTree>
-  </p:cSld>
-  <p:clrMapOvr>
-    <a:masterClrMapping/>
-  </p:clrMapOvr>
-</p:sld>
-</file>
-
-<file path=ppt/slides/slide34.xml><?xml version="1.0" encoding="utf-8"?>
-<p:sld xmlns:a="http://schemas.openxmlformats.org/drawingml/2006/main" xmlns:p="http://schemas.openxmlformats.org/presentationml/2006/main" xmlns:r="http://schemas.openxmlformats.org/officeDocument/2006/relationships">
-  <p:cSld>
-    <p:spTree>
-      <p:nvGrpSpPr>
-        <p:cNvPr id="1" name=""/>
-        <p:cNvGrpSpPr/>
-        <p:nvPr/>
-      </p:nvGrpSpPr>
-      <p:grpSpPr/>
-      <p:sp>
-        <p:nvSpPr>
-          <p:cNvPr id="2" name="Rectangle 1"/>
-          <p:cNvSpPr/>
-          <p:nvPr/>
-        </p:nvSpPr>
-        <p:spPr>
-          <a:xfrm>
-            <a:off x="457200" y="384048"/>
-            <a:ext cx="45720" cy="256032"/>
-          </a:xfrm>
-          <a:prstGeom prst="rect">
-            <a:avLst/>
-          </a:prstGeom>
-          <a:solidFill>
-            <a:srgbClr val="009CD6"/>
-          </a:solidFill>
-          <a:ln>
-            <a:noFill/>
-          </a:ln>
-          <a:effectLst/>
-        </p:spPr>
-        <p:style>
-          <a:lnRef idx="1">
-            <a:schemeClr val="accent1"/>
-          </a:lnRef>
-          <a:fillRef idx="3">
-            <a:schemeClr val="accent1"/>
-          </a:fillRef>
-          <a:effectRef idx="2">
-            <a:schemeClr val="accent1"/>
-          </a:effectRef>
-          <a:fontRef idx="minor">
-            <a:schemeClr val="lt1"/>
-          </a:fontRef>
-        </p:style>
-        <p:txBody>
-          <a:bodyPr rtlCol="0" anchor="ctr"/>
-          <a:lstStyle/>
-          <a:p>
-            <a:pPr algn="ctr"/>
-          </a:p>
-        </p:txBody>
-      </p:sp>
-      <p:sp>
-        <p:nvSpPr>
-          <p:cNvPr id="3" name="TextBox 2"/>
-          <p:cNvSpPr txBox="1"/>
-          <p:nvPr/>
-        </p:nvSpPr>
-        <p:spPr>
-          <a:xfrm>
-            <a:off x="621792" y="274320"/>
-            <a:ext cx="11247120" cy="914400"/>
-          </a:xfrm>
-          <a:prstGeom prst="rect">
-            <a:avLst/>
-          </a:prstGeom>
-          <a:noFill/>
-        </p:spPr>
-        <p:txBody>
-          <a:bodyPr wrap="square">
-            <a:spAutoFit/>
-          </a:bodyPr>
-          <a:lstStyle/>
-          <a:p>
-            <a:r>
-              <a:rPr sz="2800" b="1" i="0">
-                <a:solidFill>
-                  <a:srgbClr val="1A1A1A"/>
-                </a:solidFill>
-                <a:latin typeface="Arial"/>
-              </a:rPr>
-              <a:t>Business layer — capabilities belong to bodies, services sit on top</a:t>
-            </a:r>
-          </a:p>
-        </p:txBody>
-      </p:sp>
-      <p:sp>
-        <p:nvSpPr>
-          <p:cNvPr id="4" name="Rounded Rectangle 3"/>
-          <p:cNvSpPr/>
-          <p:nvPr/>
-        </p:nvSpPr>
-        <p:spPr>
-          <a:xfrm>
-            <a:off x="658368" y="1554480"/>
-            <a:ext cx="5394960" cy="3977639"/>
-          </a:xfrm>
-          <a:prstGeom prst="roundRect">
-            <a:avLst>
-              <a:gd name="adj" fmla="val 4500"/>
-            </a:avLst>
-          </a:prstGeom>
-          <a:solidFill>
-            <a:srgbClr val="E5F5FB"/>
-          </a:solidFill>
-          <a:ln>
-            <a:noFill/>
-          </a:ln>
-          <a:effectLst/>
-        </p:spPr>
-        <p:style>
-          <a:lnRef idx="1">
-            <a:schemeClr val="accent1"/>
-          </a:lnRef>
-          <a:fillRef idx="3">
-            <a:schemeClr val="accent1"/>
-          </a:fillRef>
-          <a:effectRef idx="2">
-            <a:schemeClr val="accent1"/>
-          </a:effectRef>
-          <a:fontRef idx="minor">
-            <a:schemeClr val="lt1"/>
-          </a:fontRef>
-        </p:style>
-        <p:txBody>
-          <a:bodyPr rtlCol="0" anchor="ctr"/>
-          <a:lstStyle/>
-          <a:p>
-            <a:pPr algn="ctr"/>
-          </a:p>
-        </p:txBody>
-      </p:sp>
-      <p:sp>
-        <p:nvSpPr>
-          <p:cNvPr id="5" name="TextBox 4"/>
-          <p:cNvSpPr txBox="1"/>
-          <p:nvPr/>
-        </p:nvSpPr>
-        <p:spPr>
-          <a:xfrm>
-            <a:off x="859536" y="1700784"/>
-            <a:ext cx="4992624" cy="3703320"/>
-          </a:xfrm>
-          <a:prstGeom prst="rect">
-            <a:avLst/>
-          </a:prstGeom>
-          <a:noFill/>
-        </p:spPr>
-        <p:txBody>
-          <a:bodyPr wrap="square">
-            <a:spAutoFit/>
-          </a:bodyPr>
-          <a:lstStyle/>
-          <a:p>
-            <a:pPr>
-              <a:spcAft>
-                <a:spcPts val="700"/>
-              </a:spcAft>
-            </a:pPr>
-            <a:r>
-              <a:rPr sz="1900" b="1" i="0">
-                <a:solidFill>
-                  <a:srgbClr val="006E96"/>
-                </a:solidFill>
-                <a:latin typeface="Arial"/>
-              </a:rPr>
-              <a:t>Capabilities</a:t>
-            </a:r>
-          </a:p>
-          <a:p>
-            <a:pPr>
-              <a:spcAft>
-                <a:spcPts val="700"/>
-              </a:spcAft>
-            </a:pPr>
-            <a:r>
-              <a:rPr sz="1600" b="0" i="0">
-                <a:solidFill>
-                  <a:srgbClr val="1A1A1A"/>
-                </a:solidFill>
-                <a:latin typeface="Arial"/>
-              </a:rPr>
-              <a:t>Register a learner — PLR</a:t>
-            </a:r>
-          </a:p>
-          <a:p>
-            <a:pPr>
-              <a:spcAft>
-                <a:spcPts val="700"/>
-              </a:spcAft>
-            </a:pPr>
-            <a:r>
-              <a:rPr sz="1600" b="0" i="0">
-                <a:solidFill>
-                  <a:srgbClr val="1A1A1A"/>
-                </a:solidFill>
-                <a:latin typeface="Arial"/>
-              </a:rPr>
-              <a:t>Run an examination, certify a result — PNEA</a:t>
-            </a:r>
-          </a:p>
-          <a:p>
-            <a:pPr>
-              <a:spcAft>
-                <a:spcPts val="700"/>
-              </a:spcAft>
-            </a:pPr>
-            <a:r>
-              <a:rPr sz="1600" b="0" i="0">
-                <a:solidFill>
-                  <a:srgbClr val="1A1A1A"/>
-                </a:solidFill>
-                <a:latin typeface="Arial"/>
-              </a:rPr>
-              <a:t>Prove identity — PNIA</a:t>
-            </a:r>
-          </a:p>
-          <a:p>
-            <a:pPr>
-              <a:spcAft>
-                <a:spcPts val="700"/>
-              </a:spcAft>
-            </a:pPr>
-            <a:r>
-              <a:rPr sz="1600" b="0" i="0">
-                <a:solidFill>
-                  <a:srgbClr val="1A1A1A"/>
-                </a:solidFill>
-                <a:latin typeface="Arial"/>
-              </a:rPr>
-              <a:t>Set policy, fund schools — MoEYS</a:t>
-            </a:r>
-          </a:p>
-        </p:txBody>
-      </p:sp>
-      <p:sp>
-        <p:nvSpPr>
-          <p:cNvPr id="6" name="Rounded Rectangle 5"/>
-          <p:cNvSpPr/>
-          <p:nvPr/>
-        </p:nvSpPr>
-        <p:spPr>
-          <a:xfrm>
-            <a:off x="6263640" y="1554480"/>
-            <a:ext cx="5394960" cy="3977639"/>
-          </a:xfrm>
-          <a:prstGeom prst="roundRect">
-            <a:avLst>
-              <a:gd name="adj" fmla="val 4500"/>
-            </a:avLst>
-          </a:prstGeom>
-          <a:solidFill>
-            <a:srgbClr val="F2F2F2"/>
-          </a:solidFill>
-          <a:ln>
-            <a:noFill/>
-          </a:ln>
-          <a:effectLst/>
-        </p:spPr>
-        <p:style>
-          <a:lnRef idx="1">
-            <a:schemeClr val="accent1"/>
-          </a:lnRef>
-          <a:fillRef idx="3">
-            <a:schemeClr val="accent1"/>
-          </a:fillRef>
-          <a:effectRef idx="2">
-            <a:schemeClr val="accent1"/>
-          </a:effectRef>
-          <a:fontRef idx="minor">
-            <a:schemeClr val="lt1"/>
-          </a:fontRef>
-        </p:style>
-        <p:txBody>
-          <a:bodyPr rtlCol="0" anchor="ctr"/>
-          <a:lstStyle/>
-          <a:p>
-            <a:pPr algn="ctr"/>
-          </a:p>
-        </p:txBody>
-      </p:sp>
-      <p:sp>
-        <p:nvSpPr>
-          <p:cNvPr id="7" name="TextBox 6"/>
-          <p:cNvSpPr txBox="1"/>
-          <p:nvPr/>
-        </p:nvSpPr>
-        <p:spPr>
-          <a:xfrm>
-            <a:off x="6464808" y="1700784"/>
-            <a:ext cx="4992624" cy="3703320"/>
-          </a:xfrm>
-          <a:prstGeom prst="rect">
-            <a:avLst/>
-          </a:prstGeom>
-          <a:noFill/>
-        </p:spPr>
-        <p:txBody>
-          <a:bodyPr wrap="square">
-            <a:spAutoFit/>
-          </a:bodyPr>
-          <a:lstStyle/>
-          <a:p>
-            <a:pPr>
-              <a:spcAft>
-                <a:spcPts val="700"/>
-              </a:spcAft>
-            </a:pPr>
-            <a:r>
-              <a:rPr sz="1900" b="1" i="0">
-                <a:solidFill>
-                  <a:srgbClr val="006E96"/>
-                </a:solidFill>
-                <a:latin typeface="Arial"/>
-              </a:rPr>
-              <a:t>Services</a:t>
-            </a:r>
-          </a:p>
-          <a:p>
-            <a:pPr>
-              <a:spcAft>
-                <a:spcPts val="700"/>
-              </a:spcAft>
-            </a:pPr>
-            <a:r>
-              <a:rPr sz="1600" b="0" i="0">
-                <a:solidFill>
-                  <a:srgbClr val="1A1A1A"/>
-                </a:solidFill>
-                <a:latin typeface="Arial"/>
-              </a:rPr>
-              <a:t>Enrol a child</a:t>
-            </a:r>
-          </a:p>
-          <a:p>
-            <a:pPr>
-              <a:spcAft>
-                <a:spcPts val="700"/>
-              </a:spcAft>
-            </a:pPr>
-            <a:r>
-              <a:rPr sz="1600" b="0" i="0">
-                <a:solidFill>
-                  <a:srgbClr val="1A1A1A"/>
-                </a:solidFill>
-                <a:latin typeface="Arial"/>
-              </a:rPr>
-              <a:t>Sit an examination</a:t>
-            </a:r>
-          </a:p>
-          <a:p>
-            <a:pPr>
-              <a:spcAft>
-                <a:spcPts val="700"/>
-              </a:spcAft>
-            </a:pPr>
-            <a:r>
-              <a:rPr sz="1600" b="0" i="0">
-                <a:solidFill>
-                  <a:srgbClr val="1A1A1A"/>
-                </a:solidFill>
-                <a:latin typeface="Arial"/>
-              </a:rPr>
-              <a:t>Receive a certificate</a:t>
-            </a:r>
-          </a:p>
-          <a:p>
-            <a:pPr>
-              <a:spcAft>
-                <a:spcPts val="700"/>
-              </a:spcAft>
-            </a:pPr>
-            <a:r>
-              <a:rPr sz="1600" b="0" i="0">
-                <a:solidFill>
-                  <a:srgbClr val="1A1A1A"/>
-                </a:solidFill>
-                <a:latin typeface="Arial"/>
-              </a:rPr>
-              <a:t>Transfer schools</a:t>
-            </a:r>
-          </a:p>
-        </p:txBody>
-      </p:sp>
-      <p:sp>
-        <p:nvSpPr>
-          <p:cNvPr id="8" name="TextBox 7"/>
-          <p:cNvSpPr txBox="1"/>
-          <p:nvPr/>
-        </p:nvSpPr>
-        <p:spPr>
-          <a:xfrm>
-            <a:off x="658368" y="5715000"/>
-            <a:ext cx="10881360" cy="548640"/>
-          </a:xfrm>
-          <a:prstGeom prst="rect">
-            <a:avLst/>
-          </a:prstGeom>
-          <a:noFill/>
-        </p:spPr>
-        <p:txBody>
-          <a:bodyPr wrap="square">
-            <a:spAutoFit/>
-          </a:bodyPr>
-          <a:lstStyle/>
-          <a:p>
-            <a:r>
-              <a:rPr sz="1550" b="1" i="0">
-                <a:solidFill>
-                  <a:srgbClr val="006E96"/>
-                </a:solidFill>
-                <a:latin typeface="Arial"/>
-              </a:rPr>
-              <a:t>Each service traces down to a capability owned by exactly one body. Two bodies claiming one capability is your first gap.</a:t>
-            </a:r>
-          </a:p>
-        </p:txBody>
-      </p:sp>
-      <p:sp>
-        <p:nvSpPr>
-          <p:cNvPr id="9" name="TextBox 8"/>
-          <p:cNvSpPr txBox="1"/>
-          <p:nvPr/>
-        </p:nvSpPr>
-        <p:spPr>
-          <a:xfrm>
-            <a:off x="457200" y="6473952"/>
-            <a:ext cx="7772400" cy="292608"/>
-          </a:xfrm>
-          <a:prstGeom prst="rect">
-            <a:avLst/>
-          </a:prstGeom>
-          <a:noFill/>
-        </p:spPr>
-        <p:txBody>
-          <a:bodyPr wrap="square">
-            <a:spAutoFit/>
-          </a:bodyPr>
-          <a:lstStyle/>
-          <a:p>
-            <a:r>
-              <a:rPr sz="900" b="0" i="0">
-                <a:solidFill>
-                  <a:srgbClr val="595959"/>
-                </a:solidFill>
-                <a:latin typeface="Arial"/>
-              </a:rPr>
-              <a:t>2.5 · BDAT on a real ministry — the Progressa walkthrough</a:t>
-            </a:r>
-          </a:p>
-        </p:txBody>
-      </p:sp>
-    </p:spTree>
-  </p:cSld>
-  <p:clrMapOvr>
-    <a:masterClrMapping/>
-  </p:clrMapOvr>
-</p:sld>
-</file>
-
-<file path=ppt/slides/slide35.xml><?xml version="1.0" encoding="utf-8"?>
-<p:sld xmlns:a="http://schemas.openxmlformats.org/drawingml/2006/main" xmlns:p="http://schemas.openxmlformats.org/presentationml/2006/main" xmlns:r="http://schemas.openxmlformats.org/officeDocument/2006/relationships">
-  <p:cSld>
-    <p:spTree>
-      <p:nvGrpSpPr>
-        <p:cNvPr id="1" name=""/>
-        <p:cNvGrpSpPr/>
-        <p:nvPr/>
-      </p:nvGrpSpPr>
-      <p:grpSpPr/>
-      <p:sp>
-        <p:nvSpPr>
-          <p:cNvPr id="2" name="Rectangle 1"/>
-          <p:cNvSpPr/>
-          <p:nvPr/>
-        </p:nvSpPr>
-        <p:spPr>
-          <a:xfrm>
-            <a:off x="457200" y="384048"/>
-            <a:ext cx="45720" cy="256032"/>
-          </a:xfrm>
-          <a:prstGeom prst="rect">
-            <a:avLst/>
-          </a:prstGeom>
-          <a:solidFill>
-            <a:srgbClr val="009CD6"/>
-          </a:solidFill>
-          <a:ln>
-            <a:noFill/>
-          </a:ln>
-          <a:effectLst/>
-        </p:spPr>
-        <p:style>
-          <a:lnRef idx="1">
-            <a:schemeClr val="accent1"/>
-          </a:lnRef>
-          <a:fillRef idx="3">
-            <a:schemeClr val="accent1"/>
-          </a:fillRef>
-          <a:effectRef idx="2">
-            <a:schemeClr val="accent1"/>
-          </a:effectRef>
-          <a:fontRef idx="minor">
-            <a:schemeClr val="lt1"/>
-          </a:fontRef>
-        </p:style>
-        <p:txBody>
-          <a:bodyPr rtlCol="0" anchor="ctr"/>
-          <a:lstStyle/>
-          <a:p>
-            <a:pPr algn="ctr"/>
-          </a:p>
-        </p:txBody>
-      </p:sp>
-      <p:sp>
-        <p:nvSpPr>
-          <p:cNvPr id="3" name="TextBox 2"/>
-          <p:cNvSpPr txBox="1"/>
-          <p:nvPr/>
-        </p:nvSpPr>
-        <p:spPr>
-          <a:xfrm>
-            <a:off x="621792" y="274320"/>
-            <a:ext cx="11247120" cy="914400"/>
-          </a:xfrm>
-          <a:prstGeom prst="rect">
-            <a:avLst/>
-          </a:prstGeom>
-          <a:noFill/>
-        </p:spPr>
-        <p:txBody>
-          <a:bodyPr wrap="square">
-            <a:spAutoFit/>
-          </a:bodyPr>
-          <a:lstStyle/>
-          <a:p>
-            <a:r>
-              <a:rPr sz="2800" b="1" i="0">
-                <a:solidFill>
-                  <a:srgbClr val="1A1A1A"/>
-                </a:solidFill>
-                <a:latin typeface="Arial"/>
-              </a:rPr>
-              <a:t>Data layer — one domain, one owner, one authoritative copy</a:t>
-            </a:r>
-          </a:p>
-        </p:txBody>
-      </p:sp>
-      <p:sp>
-        <p:nvSpPr>
-          <p:cNvPr id="4" name="TextBox 3"/>
-          <p:cNvSpPr txBox="1"/>
-          <p:nvPr/>
-        </p:nvSpPr>
-        <p:spPr>
-          <a:xfrm>
-            <a:off x="658368" y="1463040"/>
-            <a:ext cx="10984687" cy="777240"/>
-          </a:xfrm>
-          <a:prstGeom prst="rect">
-            <a:avLst/>
-          </a:prstGeom>
-          <a:noFill/>
-        </p:spPr>
-        <p:txBody>
-          <a:bodyPr wrap="square">
-            <a:spAutoFit/>
-          </a:bodyPr>
-          <a:lstStyle/>
-          <a:p>
-            <a:pPr>
-              <a:spcAft>
-                <a:spcPts val="300"/>
-              </a:spcAft>
-            </a:pPr>
-            <a:r>
-              <a:rPr sz="1900" b="1" i="0">
-                <a:solidFill>
-                  <a:srgbClr val="1A1A1A"/>
-                </a:solidFill>
-                <a:latin typeface="Arial"/>
-              </a:rPr>
-              <a:t>Person</a:t>
-            </a:r>
-          </a:p>
-          <a:p>
-            <a:pPr>
-              <a:spcAft>
-                <a:spcPts val="300"/>
-              </a:spcAft>
-            </a:pPr>
-            <a:r>
-              <a:rPr sz="1550" b="0" i="0">
-                <a:solidFill>
-                  <a:srgbClr val="595959"/>
-                </a:solidFill>
-                <a:latin typeface="Arial"/>
-              </a:rPr>
-              <a:t>Owned by PNIA. Everyone else uses the person identity; no one else mints it.</a:t>
-            </a:r>
-          </a:p>
-        </p:txBody>
-      </p:sp>
-      <p:sp>
-        <p:nvSpPr>
-          <p:cNvPr id="5" name="Rectangle 4"/>
-          <p:cNvSpPr/>
-          <p:nvPr/>
-        </p:nvSpPr>
-        <p:spPr>
-          <a:xfrm>
-            <a:off x="621792" y="2244852"/>
-            <a:ext cx="10881360" cy="12700"/>
-          </a:xfrm>
-          <a:prstGeom prst="rect">
-            <a:avLst/>
-          </a:prstGeom>
-          <a:solidFill>
-            <a:srgbClr val="DDECF4"/>
-          </a:solidFill>
-          <a:ln>
-            <a:noFill/>
-          </a:ln>
-          <a:effectLst/>
-        </p:spPr>
-        <p:style>
-          <a:lnRef idx="1">
-            <a:schemeClr val="accent1"/>
-          </a:lnRef>
-          <a:fillRef idx="3">
-            <a:schemeClr val="accent1"/>
-          </a:fillRef>
-          <a:effectRef idx="2">
-            <a:schemeClr val="accent1"/>
-          </a:effectRef>
-          <a:fontRef idx="minor">
-            <a:schemeClr val="lt1"/>
-          </a:fontRef>
-        </p:style>
-        <p:txBody>
-          <a:bodyPr rtlCol="0" anchor="ctr"/>
-          <a:lstStyle/>
-          <a:p>
-            <a:pPr algn="ctr"/>
-          </a:p>
-        </p:txBody>
-      </p:sp>
-      <p:sp>
-        <p:nvSpPr>
-          <p:cNvPr id="6" name="TextBox 5"/>
-          <p:cNvSpPr txBox="1"/>
-          <p:nvPr/>
-        </p:nvSpPr>
-        <p:spPr>
-          <a:xfrm>
-            <a:off x="658368" y="2286000"/>
-            <a:ext cx="10984687" cy="777240"/>
-          </a:xfrm>
-          <a:prstGeom prst="rect">
-            <a:avLst/>
-          </a:prstGeom>
-          <a:noFill/>
-        </p:spPr>
-        <p:txBody>
-          <a:bodyPr wrap="square">
-            <a:spAutoFit/>
-          </a:bodyPr>
-          <a:lstStyle/>
-          <a:p>
-            <a:pPr>
-              <a:spcAft>
-                <a:spcPts val="300"/>
-              </a:spcAft>
-            </a:pPr>
-            <a:r>
-              <a:rPr sz="1900" b="1" i="0">
-                <a:solidFill>
-                  <a:srgbClr val="1A1A1A"/>
-                </a:solidFill>
-                <a:latin typeface="Arial"/>
-              </a:rPr>
-              <a:t>Learner</a:t>
-            </a:r>
-          </a:p>
-          <a:p>
-            <a:pPr>
-              <a:spcAft>
-                <a:spcPts val="300"/>
-              </a:spcAft>
-            </a:pPr>
-            <a:r>
-              <a:rPr sz="1550" b="0" i="0">
-                <a:solidFill>
-                  <a:srgbClr val="595959"/>
-                </a:solidFill>
-                <a:latin typeface="Arial"/>
-              </a:rPr>
-              <a:t>Owned by PLR.</a:t>
-            </a:r>
-          </a:p>
-        </p:txBody>
-      </p:sp>
-      <p:sp>
-        <p:nvSpPr>
-          <p:cNvPr id="7" name="Rectangle 6"/>
-          <p:cNvSpPr/>
-          <p:nvPr/>
-        </p:nvSpPr>
-        <p:spPr>
-          <a:xfrm>
-            <a:off x="621792" y="3067812"/>
-            <a:ext cx="10881360" cy="12700"/>
-          </a:xfrm>
-          <a:prstGeom prst="rect">
-            <a:avLst/>
-          </a:prstGeom>
-          <a:solidFill>
-            <a:srgbClr val="DDECF4"/>
-          </a:solidFill>
-          <a:ln>
-            <a:noFill/>
-          </a:ln>
-          <a:effectLst/>
-        </p:spPr>
-        <p:style>
-          <a:lnRef idx="1">
-            <a:schemeClr val="accent1"/>
-          </a:lnRef>
-          <a:fillRef idx="3">
-            <a:schemeClr val="accent1"/>
-          </a:fillRef>
-          <a:effectRef idx="2">
-            <a:schemeClr val="accent1"/>
-          </a:effectRef>
-          <a:fontRef idx="minor">
-            <a:schemeClr val="lt1"/>
-          </a:fontRef>
-        </p:style>
-        <p:txBody>
-          <a:bodyPr rtlCol="0" anchor="ctr"/>
-          <a:lstStyle/>
-          <a:p>
-            <a:pPr algn="ctr"/>
-          </a:p>
-        </p:txBody>
-      </p:sp>
-      <p:sp>
-        <p:nvSpPr>
-          <p:cNvPr id="8" name="TextBox 7"/>
-          <p:cNvSpPr txBox="1"/>
-          <p:nvPr/>
-        </p:nvSpPr>
-        <p:spPr>
-          <a:xfrm>
-            <a:off x="658368" y="3108960"/>
-            <a:ext cx="10984687" cy="777240"/>
-          </a:xfrm>
-          <a:prstGeom prst="rect">
-            <a:avLst/>
-          </a:prstGeom>
-          <a:noFill/>
-        </p:spPr>
-        <p:txBody>
-          <a:bodyPr wrap="square">
-            <a:spAutoFit/>
-          </a:bodyPr>
-          <a:lstStyle/>
-          <a:p>
-            <a:pPr>
-              <a:spcAft>
-                <a:spcPts val="300"/>
-              </a:spcAft>
-            </a:pPr>
-            <a:r>
-              <a:rPr sz="1900" b="1" i="0">
-                <a:solidFill>
-                  <a:srgbClr val="1A1A1A"/>
-                </a:solidFill>
-                <a:latin typeface="Arial"/>
-              </a:rPr>
-              <a:t>Examination result</a:t>
-            </a:r>
-          </a:p>
-          <a:p>
-            <a:pPr>
-              <a:spcAft>
-                <a:spcPts val="300"/>
-              </a:spcAft>
-            </a:pPr>
-            <a:r>
-              <a:rPr sz="1550" b="0" i="0">
-                <a:solidFill>
-                  <a:srgbClr val="595959"/>
-                </a:solidFill>
-                <a:latin typeface="Arial"/>
-              </a:rPr>
-              <a:t>Owned by PNEA.</a:t>
-            </a:r>
-          </a:p>
-        </p:txBody>
-      </p:sp>
-      <p:sp>
-        <p:nvSpPr>
-          <p:cNvPr id="9" name="Rectangle 8"/>
-          <p:cNvSpPr/>
-          <p:nvPr/>
-        </p:nvSpPr>
-        <p:spPr>
-          <a:xfrm>
-            <a:off x="621792" y="3890772"/>
-            <a:ext cx="10881360" cy="12700"/>
-          </a:xfrm>
-          <a:prstGeom prst="rect">
-            <a:avLst/>
-          </a:prstGeom>
-          <a:solidFill>
-            <a:srgbClr val="DDECF4"/>
-          </a:solidFill>
-          <a:ln>
-            <a:noFill/>
-          </a:ln>
-          <a:effectLst/>
-        </p:spPr>
-        <p:style>
-          <a:lnRef idx="1">
-            <a:schemeClr val="accent1"/>
-          </a:lnRef>
-          <a:fillRef idx="3">
-            <a:schemeClr val="accent1"/>
-          </a:fillRef>
-          <a:effectRef idx="2">
-            <a:schemeClr val="accent1"/>
-          </a:effectRef>
-          <a:fontRef idx="minor">
-            <a:schemeClr val="lt1"/>
-          </a:fontRef>
-        </p:style>
-        <p:txBody>
-          <a:bodyPr rtlCol="0" anchor="ctr"/>
-          <a:lstStyle/>
-          <a:p>
-            <a:pPr algn="ctr"/>
-          </a:p>
-        </p:txBody>
-      </p:sp>
-      <p:sp>
-        <p:nvSpPr>
-          <p:cNvPr id="10" name="TextBox 9"/>
-          <p:cNvSpPr txBox="1"/>
-          <p:nvPr/>
-        </p:nvSpPr>
-        <p:spPr>
-          <a:xfrm>
-            <a:off x="658368" y="3931920"/>
-            <a:ext cx="10984687" cy="777240"/>
-          </a:xfrm>
-          <a:prstGeom prst="rect">
-            <a:avLst/>
-          </a:prstGeom>
-          <a:noFill/>
-        </p:spPr>
-        <p:txBody>
-          <a:bodyPr wrap="square">
-            <a:spAutoFit/>
-          </a:bodyPr>
-          <a:lstStyle/>
-          <a:p>
-            <a:pPr>
-              <a:spcAft>
-                <a:spcPts val="300"/>
-              </a:spcAft>
-            </a:pPr>
-            <a:r>
-              <a:rPr sz="1900" b="1" i="0">
-                <a:solidFill>
-                  <a:srgbClr val="1A1A1A"/>
-                </a:solidFill>
-                <a:latin typeface="Arial"/>
-              </a:rPr>
-              <a:t>School</a:t>
-            </a:r>
-          </a:p>
-          <a:p>
-            <a:pPr>
-              <a:spcAft>
-                <a:spcPts val="300"/>
-              </a:spcAft>
-            </a:pPr>
-            <a:r>
-              <a:rPr sz="1550" b="0" i="0">
-                <a:solidFill>
-                  <a:srgbClr val="595959"/>
-                </a:solidFill>
-                <a:latin typeface="Arial"/>
-              </a:rPr>
-              <a:t>Owned by MoEYS.</a:t>
-            </a:r>
-          </a:p>
-        </p:txBody>
-      </p:sp>
-      <p:sp>
-        <p:nvSpPr>
-          <p:cNvPr id="11" name="Rounded Rectangle 10"/>
-          <p:cNvSpPr/>
-          <p:nvPr/>
-        </p:nvSpPr>
-        <p:spPr>
-          <a:xfrm>
-            <a:off x="658368" y="4937760"/>
-            <a:ext cx="10881360" cy="1234440"/>
-          </a:xfrm>
-          <a:prstGeom prst="roundRect">
-            <a:avLst>
-              <a:gd name="adj" fmla="val 4500"/>
-            </a:avLst>
-          </a:prstGeom>
-          <a:solidFill>
-            <a:srgbClr val="009CD6"/>
-          </a:solidFill>
-          <a:ln>
-            <a:noFill/>
-          </a:ln>
-          <a:effectLst/>
-        </p:spPr>
-        <p:style>
-          <a:lnRef idx="1">
-            <a:schemeClr val="accent1"/>
-          </a:lnRef>
-          <a:fillRef idx="3">
-            <a:schemeClr val="accent1"/>
-          </a:fillRef>
-          <a:effectRef idx="2">
-            <a:schemeClr val="accent1"/>
-          </a:effectRef>
-          <a:fontRef idx="minor">
-            <a:schemeClr val="lt1"/>
-          </a:fontRef>
-        </p:style>
-        <p:txBody>
-          <a:bodyPr rtlCol="0" anchor="ctr"/>
-          <a:lstStyle/>
-          <a:p>
-            <a:pPr algn="ctr"/>
-          </a:p>
-        </p:txBody>
-      </p:sp>
-      <p:sp>
-        <p:nvSpPr>
-          <p:cNvPr id="12" name="TextBox 11"/>
-          <p:cNvSpPr txBox="1"/>
-          <p:nvPr/>
-        </p:nvSpPr>
-        <p:spPr>
-          <a:xfrm>
-            <a:off x="859536" y="5084064"/>
-            <a:ext cx="10479024" cy="960120"/>
-          </a:xfrm>
-          <a:prstGeom prst="rect">
-            <a:avLst/>
-          </a:prstGeom>
-          <a:noFill/>
-        </p:spPr>
-        <p:txBody>
-          <a:bodyPr wrap="square">
-            <a:spAutoFit/>
-          </a:bodyPr>
-          <a:lstStyle/>
-          <a:p>
-            <a:pPr>
-              <a:spcAft>
-                <a:spcPts val="700"/>
-              </a:spcAft>
-            </a:pPr>
-            <a:r>
-              <a:rPr sz="2000" b="1" i="0">
-                <a:solidFill>
-                  <a:srgbClr val="FFFFFF"/>
-                </a:solidFill>
-                <a:latin typeface="Arial"/>
-              </a:rPr>
-              <a:t>Once-only made concrete: others consume, they do not copy.</a:t>
-            </a:r>
-          </a:p>
-          <a:p>
-            <a:pPr>
-              <a:spcAft>
-                <a:spcPts val="700"/>
-              </a:spcAft>
-            </a:pPr>
-            <a:r>
-              <a:rPr sz="1500" b="0" i="0">
-                <a:solidFill>
-                  <a:srgbClr val="FFFFFF"/>
-                </a:solidFill>
-                <a:latin typeface="Arial"/>
-              </a:rPr>
-              <a:t>An examination authority keeping its own learner list is a duplicate registry — write it down.</a:t>
-            </a:r>
-          </a:p>
-        </p:txBody>
-      </p:sp>
-      <p:sp>
-        <p:nvSpPr>
-          <p:cNvPr id="13" name="TextBox 12"/>
-          <p:cNvSpPr txBox="1"/>
-          <p:nvPr/>
-        </p:nvSpPr>
-        <p:spPr>
-          <a:xfrm>
-            <a:off x="457200" y="6473952"/>
-            <a:ext cx="7772400" cy="292608"/>
-          </a:xfrm>
-          <a:prstGeom prst="rect">
-            <a:avLst/>
-          </a:prstGeom>
-          <a:noFill/>
-        </p:spPr>
-        <p:txBody>
-          <a:bodyPr wrap="square">
-            <a:spAutoFit/>
-          </a:bodyPr>
-          <a:lstStyle/>
-          <a:p>
-            <a:r>
-              <a:rPr sz="900" b="0" i="0">
-                <a:solidFill>
-                  <a:srgbClr val="595959"/>
-                </a:solidFill>
-                <a:latin typeface="Arial"/>
-              </a:rPr>
-              <a:t>2.5 · BDAT on a real ministry — the Progressa walkthrough</a:t>
-            </a:r>
-          </a:p>
-        </p:txBody>
-      </p:sp>
-    </p:spTree>
-  </p:cSld>
-  <p:clrMapOvr>
-    <a:masterClrMapping/>
-  </p:clrMapOvr>
-</p:sld>
-</file>
-
 <file path=ppt/slides/slide36.xml><?xml version="1.0" encoding="utf-8"?>
 <p:sld xmlns:a="http://schemas.openxmlformats.org/drawingml/2006/main" xmlns:p="http://schemas.openxmlformats.org/presentationml/2006/main" xmlns:r="http://schemas.openxmlformats.org/officeDocument/2006/relationships">
   <p:cSld>
@@ -14103,58 +11632,14 @@
       <p:grpSpPr/>
       <p:sp>
         <p:nvSpPr>
-          <p:cNvPr id="2" name="Rectangle 1"/>
-          <p:cNvSpPr/>
-          <p:nvPr/>
-        </p:nvSpPr>
-        <p:spPr>
-          <a:xfrm>
-            <a:off x="457200" y="384048"/>
-            <a:ext cx="45720" cy="256032"/>
-          </a:xfrm>
-          <a:prstGeom prst="rect">
-            <a:avLst/>
-          </a:prstGeom>
-          <a:solidFill>
-            <a:srgbClr val="009CD6"/>
-          </a:solidFill>
-          <a:ln>
-            <a:noFill/>
-          </a:ln>
-          <a:effectLst/>
-        </p:spPr>
-        <p:style>
-          <a:lnRef idx="1">
-            <a:schemeClr val="accent1"/>
-          </a:lnRef>
-          <a:fillRef idx="3">
-            <a:schemeClr val="accent1"/>
-          </a:fillRef>
-          <a:effectRef idx="2">
-            <a:schemeClr val="accent1"/>
-          </a:effectRef>
-          <a:fontRef idx="minor">
-            <a:schemeClr val="lt1"/>
-          </a:fontRef>
-        </p:style>
-        <p:txBody>
-          <a:bodyPr rtlCol="0" anchor="ctr"/>
-          <a:lstStyle/>
-          <a:p>
-            <a:pPr algn="ctr"/>
-          </a:p>
-        </p:txBody>
-      </p:sp>
-      <p:sp>
-        <p:nvSpPr>
-          <p:cNvPr id="3" name="TextBox 2"/>
+          <p:cNvPr id="2" name="TextBox 1"/>
           <p:cNvSpPr txBox="1"/>
           <p:nvPr/>
         </p:nvSpPr>
         <p:spPr>
           <a:xfrm>
-            <a:off x="621792" y="274320"/>
-            <a:ext cx="11247120" cy="914400"/>
+            <a:off x="822960" y="822960"/>
+            <a:ext cx="7315200" cy="457200"/>
           </a:xfrm>
           <a:prstGeom prst="rect">
             <a:avLst/>
@@ -14168,60 +11653,82 @@
           <a:lstStyle/>
           <a:p>
             <a:r>
-              <a:rPr sz="2800" b="1" i="0">
+              <a:rPr sz="1200" b="1" i="0">
+                <a:solidFill>
+                  <a:srgbClr val="595959"/>
+                </a:solidFill>
+                <a:latin typeface="Arial"/>
+              </a:rPr>
+              <a:t>KP1 · MODULE 2 · VIDEO 2.5</a:t>
+            </a:r>
+          </a:p>
+        </p:txBody>
+      </p:sp>
+      <p:sp>
+        <p:nvSpPr>
+          <p:cNvPr id="3" name="TextBox 2"/>
+          <p:cNvSpPr txBox="1"/>
+          <p:nvPr/>
+        </p:nvSpPr>
+        <p:spPr>
+          <a:xfrm>
+            <a:off x="822960" y="1828800"/>
+            <a:ext cx="2011680" cy="1097280"/>
+          </a:xfrm>
+          <a:prstGeom prst="rect">
+            <a:avLst/>
+          </a:prstGeom>
+          <a:noFill/>
+        </p:spPr>
+        <p:txBody>
+          <a:bodyPr wrap="square">
+            <a:spAutoFit/>
+          </a:bodyPr>
+          <a:lstStyle/>
+          <a:p>
+            <a:r>
+              <a:rPr sz="6000" b="1" i="0">
+                <a:solidFill>
+                  <a:srgbClr val="009CD6"/>
+                </a:solidFill>
+                <a:latin typeface="Arial"/>
+              </a:rPr>
+              <a:t>2.5</a:t>
+            </a:r>
+          </a:p>
+        </p:txBody>
+      </p:sp>
+      <p:sp>
+        <p:nvSpPr>
+          <p:cNvPr id="4" name="TextBox 3"/>
+          <p:cNvSpPr txBox="1"/>
+          <p:nvPr/>
+        </p:nvSpPr>
+        <p:spPr>
+          <a:xfrm>
+            <a:off x="822960" y="2880360"/>
+            <a:ext cx="9601200" cy="1371600"/>
+          </a:xfrm>
+          <a:prstGeom prst="rect">
+            <a:avLst/>
+          </a:prstGeom>
+          <a:noFill/>
+        </p:spPr>
+        <p:txBody>
+          <a:bodyPr wrap="square">
+            <a:spAutoFit/>
+          </a:bodyPr>
+          <a:lstStyle/>
+          <a:p>
+            <a:r>
+              <a:rPr sz="3400" b="1" i="0">
                 <a:solidFill>
                   <a:srgbClr val="1A1A1A"/>
                 </a:solidFill>
                 <a:latin typeface="Arial"/>
               </a:rPr>
-              <a:t>Application and Technology — every system points up and across</a:t>
-            </a:r>
-          </a:p>
-        </p:txBody>
-      </p:sp>
-      <p:sp>
-        <p:nvSpPr>
-          <p:cNvPr id="4" name="Rounded Rectangle 3"/>
-          <p:cNvSpPr/>
-          <p:nvPr/>
-        </p:nvSpPr>
-        <p:spPr>
-          <a:xfrm>
-            <a:off x="658368" y="1554480"/>
-            <a:ext cx="5394960" cy="3977639"/>
-          </a:xfrm>
-          <a:prstGeom prst="roundRect">
-            <a:avLst>
-              <a:gd name="adj" fmla="val 4500"/>
-            </a:avLst>
-          </a:prstGeom>
-          <a:solidFill>
-            <a:srgbClr val="E5F5FB"/>
-          </a:solidFill>
-          <a:ln>
-            <a:noFill/>
-          </a:ln>
-          <a:effectLst/>
-        </p:spPr>
-        <p:style>
-          <a:lnRef idx="1">
-            <a:schemeClr val="accent1"/>
-          </a:lnRef>
-          <a:fillRef idx="3">
-            <a:schemeClr val="accent1"/>
-          </a:fillRef>
-          <a:effectRef idx="2">
-            <a:schemeClr val="accent1"/>
-          </a:effectRef>
-          <a:fontRef idx="minor">
-            <a:schemeClr val="lt1"/>
-          </a:fontRef>
-        </p:style>
-        <p:txBody>
-          <a:bodyPr rtlCol="0" anchor="ctr"/>
-          <a:lstStyle/>
-          <a:p>
-            <a:pPr algn="ctr"/>
+              <a:t>BDAT on a real ministry — the Progressa walkthrough</a:t>
+            </a:r>
           </a:p>
         </p:txBody>
       </p:sp>
@@ -14233,8 +11740,8 @@
         </p:nvSpPr>
         <p:spPr>
           <a:xfrm>
-            <a:off x="859536" y="1700784"/>
-            <a:ext cx="4992624" cy="3703320"/>
+            <a:off x="822960" y="4343400"/>
+            <a:ext cx="9875520" cy="1554480"/>
           </a:xfrm>
           <a:prstGeom prst="rect">
             <a:avLst/>
@@ -14247,268 +11754,48 @@
           </a:bodyPr>
           <a:lstStyle/>
           <a:p>
-            <a:pPr>
-              <a:spcAft>
-                <a:spcPts val="700"/>
-              </a:spcAft>
-            </a:pPr>
-            <a:r>
-              <a:rPr sz="1900" b="1" i="0">
-                <a:solidFill>
-                  <a:srgbClr val="006E96"/>
-                </a:solidFill>
-                <a:latin typeface="Arial"/>
-              </a:rPr>
-              <a:t>Applications</a:t>
-            </a:r>
-          </a:p>
-          <a:p>
-            <a:pPr>
-              <a:spcAft>
-                <a:spcPts val="700"/>
-              </a:spcAft>
-            </a:pPr>
-            <a:r>
-              <a:rPr sz="1600" b="0" i="0">
-                <a:solidFill>
-                  <a:srgbClr val="1A1A1A"/>
-                </a:solidFill>
-                <a:latin typeface="Arial"/>
-              </a:rPr>
-              <a:t>Enrolment system → register-a-learner (PLR)</a:t>
-            </a:r>
-          </a:p>
-          <a:p>
-            <a:pPr>
-              <a:spcAft>
-                <a:spcPts val="700"/>
-              </a:spcAft>
-            </a:pPr>
-            <a:r>
-              <a:rPr sz="1600" b="0" i="0">
-                <a:solidFill>
-                  <a:srgbClr val="1A1A1A"/>
-                </a:solidFill>
-                <a:latin typeface="Arial"/>
-              </a:rPr>
-              <a:t>Exam-management system → run-an-examination (PNEA)</a:t>
-            </a:r>
-          </a:p>
-          <a:p>
-            <a:pPr>
-              <a:spcAft>
-                <a:spcPts val="700"/>
-              </a:spcAft>
-            </a:pPr>
-            <a:r>
-              <a:rPr sz="1600" b="0" i="0">
-                <a:solidFill>
-                  <a:srgbClr val="1A1A1A"/>
-                </a:solidFill>
-                <a:latin typeface="Arial"/>
-              </a:rPr>
-              <a:t>Identity-verification service → prove-identity (PNIA)</a:t>
-            </a:r>
-          </a:p>
-        </p:txBody>
-      </p:sp>
-      <p:sp>
-        <p:nvSpPr>
-          <p:cNvPr id="6" name="Rounded Rectangle 5"/>
-          <p:cNvSpPr/>
-          <p:nvPr/>
-        </p:nvSpPr>
-        <p:spPr>
-          <a:xfrm>
-            <a:off x="6263640" y="1554480"/>
-            <a:ext cx="5394960" cy="3977639"/>
-          </a:xfrm>
-          <a:prstGeom prst="roundRect">
-            <a:avLst>
-              <a:gd name="adj" fmla="val 4500"/>
-            </a:avLst>
-          </a:prstGeom>
-          <a:solidFill>
-            <a:srgbClr val="E5F5FB"/>
-          </a:solidFill>
-          <a:ln>
-            <a:noFill/>
-          </a:ln>
-          <a:effectLst/>
-        </p:spPr>
-        <p:style>
-          <a:lnRef idx="1">
-            <a:schemeClr val="accent1"/>
-          </a:lnRef>
-          <a:fillRef idx="3">
-            <a:schemeClr val="accent1"/>
-          </a:fillRef>
-          <a:effectRef idx="2">
-            <a:schemeClr val="accent1"/>
-          </a:effectRef>
-          <a:fontRef idx="minor">
-            <a:schemeClr val="lt1"/>
-          </a:fontRef>
-        </p:style>
-        <p:txBody>
-          <a:bodyPr rtlCol="0" anchor="ctr"/>
-          <a:lstStyle/>
-          <a:p>
-            <a:pPr algn="ctr"/>
-          </a:p>
-        </p:txBody>
-      </p:sp>
-      <p:sp>
-        <p:nvSpPr>
-          <p:cNvPr id="7" name="TextBox 6"/>
-          <p:cNvSpPr txBox="1"/>
-          <p:nvPr/>
-        </p:nvSpPr>
-        <p:spPr>
-          <a:xfrm>
-            <a:off x="6464808" y="1700784"/>
-            <a:ext cx="4992624" cy="3703320"/>
-          </a:xfrm>
-          <a:prstGeom prst="rect">
-            <a:avLst/>
-          </a:prstGeom>
-          <a:noFill/>
-        </p:spPr>
-        <p:txBody>
-          <a:bodyPr wrap="square">
-            <a:spAutoFit/>
-          </a:bodyPr>
-          <a:lstStyle/>
-          <a:p>
-            <a:pPr>
-              <a:spcAft>
-                <a:spcPts val="700"/>
-              </a:spcAft>
-            </a:pPr>
-            <a:r>
-              <a:rPr sz="1900" b="1" i="0">
-                <a:solidFill>
-                  <a:srgbClr val="006E96"/>
-                </a:solidFill>
-                <a:latin typeface="Arial"/>
-              </a:rPr>
-              <a:t>Technology</a:t>
-            </a:r>
-          </a:p>
-          <a:p>
-            <a:pPr>
-              <a:spcAft>
-                <a:spcPts val="700"/>
-              </a:spcAft>
-            </a:pPr>
-            <a:r>
-              <a:rPr sz="1600" b="0" i="0">
-                <a:solidFill>
-                  <a:srgbClr val="1A1A1A"/>
-                </a:solidFill>
-                <a:latin typeface="Arial"/>
-              </a:rPr>
-              <a:t>Shared identity platform</a:t>
-            </a:r>
-          </a:p>
-          <a:p>
-            <a:pPr>
-              <a:spcAft>
-                <a:spcPts val="700"/>
-              </a:spcAft>
-            </a:pPr>
-            <a:r>
-              <a:rPr sz="1600" b="0" i="0">
-                <a:solidFill>
-                  <a:srgbClr val="1A1A1A"/>
-                </a:solidFill>
-                <a:latin typeface="Arial"/>
-              </a:rPr>
-              <a:t>Data-exchange backbone (PDGA)</a:t>
-            </a:r>
-          </a:p>
-          <a:p>
-            <a:pPr>
-              <a:spcAft>
-                <a:spcPts val="700"/>
-              </a:spcAft>
-            </a:pPr>
-            <a:r>
-              <a:rPr sz="1600" b="0" i="0">
-                <a:solidFill>
-                  <a:srgbClr val="1A1A1A"/>
-                </a:solidFill>
-                <a:latin typeface="Arial"/>
-              </a:rPr>
-              <a:t>Hosting</a:t>
-            </a:r>
-          </a:p>
-        </p:txBody>
-      </p:sp>
-      <p:sp>
-        <p:nvSpPr>
-          <p:cNvPr id="8" name="TextBox 7"/>
-          <p:cNvSpPr txBox="1"/>
-          <p:nvPr/>
-        </p:nvSpPr>
-        <p:spPr>
-          <a:xfrm>
-            <a:off x="658368" y="5715000"/>
-            <a:ext cx="10881360" cy="548640"/>
-          </a:xfrm>
-          <a:prstGeom prst="rect">
-            <a:avLst/>
-          </a:prstGeom>
-          <a:noFill/>
-        </p:spPr>
-        <p:txBody>
-          <a:bodyPr wrap="square">
-            <a:spAutoFit/>
-          </a:bodyPr>
-          <a:lstStyle/>
-          <a:p>
-            <a:r>
-              <a:rPr sz="1550" b="1" i="0">
-                <a:solidFill>
-                  <a:srgbClr val="006E96"/>
-                </a:solidFill>
-                <a:latin typeface="Arial"/>
-              </a:rPr>
-              <a:t>A short list of shared standards — not a server audit.</a:t>
-            </a:r>
-          </a:p>
-        </p:txBody>
-      </p:sp>
-      <p:sp>
-        <p:nvSpPr>
-          <p:cNvPr id="9" name="TextBox 8"/>
-          <p:cNvSpPr txBox="1"/>
-          <p:nvPr/>
-        </p:nvSpPr>
-        <p:spPr>
-          <a:xfrm>
-            <a:off x="457200" y="6473952"/>
-            <a:ext cx="7772400" cy="292608"/>
-          </a:xfrm>
-          <a:prstGeom prst="rect">
-            <a:avLst/>
-          </a:prstGeom>
-          <a:noFill/>
-        </p:spPr>
-        <p:txBody>
-          <a:bodyPr wrap="square">
-            <a:spAutoFit/>
-          </a:bodyPr>
-          <a:lstStyle/>
-          <a:p>
-            <a:r>
-              <a:rPr sz="900" b="0" i="0">
+            <a:r>
+              <a:rPr sz="1700" b="0" i="1">
                 <a:solidFill>
                   <a:srgbClr val="595959"/>
                 </a:solidFill>
                 <a:latin typeface="Arial"/>
               </a:rPr>
-              <a:t>2.5 · BDAT on a real ministry — the Progressa walkthrough</a:t>
+              <a:t>Watch the four layers and the shared entities applied to one real education system — Progressa's ministry, learner registry, examination authority and identity authority — and the abstract method becomes a concrete picture you can reproduce on your own sector.</a:t>
+            </a:r>
+          </a:p>
+        </p:txBody>
+      </p:sp>
+      <p:sp>
+        <p:nvSpPr>
+          <p:cNvPr id="6" name="TextBox 5"/>
+          <p:cNvSpPr txBox="1"/>
+          <p:nvPr/>
+        </p:nvSpPr>
+        <p:spPr>
+          <a:xfrm>
+            <a:off x="822960" y="5989320"/>
+            <a:ext cx="7315200" cy="365760"/>
+          </a:xfrm>
+          <a:prstGeom prst="rect">
+            <a:avLst/>
+          </a:prstGeom>
+          <a:noFill/>
+        </p:spPr>
+        <p:txBody>
+          <a:bodyPr wrap="square">
+            <a:spAutoFit/>
+          </a:bodyPr>
+          <a:lstStyle/>
+          <a:p>
+            <a:r>
+              <a:rPr sz="1200" b="0" i="0">
+                <a:solidFill>
+                  <a:srgbClr val="595959"/>
+                </a:solidFill>
+                <a:latin typeface="Arial"/>
+              </a:rPr>
+              <a:t>~5 minutes · standalone video · voice-over on text slides</a:t>
             </a:r>
           </a:p>
         </p:txBody>
@@ -14539,6 +11826,2288 @@
         </p:nvSpPr>
         <p:spPr>
           <a:xfrm>
+            <a:off x="1005840" y="1325880"/>
+            <a:ext cx="5486400" cy="365760"/>
+          </a:xfrm>
+          <a:prstGeom prst="rect">
+            <a:avLst/>
+          </a:prstGeom>
+          <a:noFill/>
+        </p:spPr>
+        <p:txBody>
+          <a:bodyPr wrap="square">
+            <a:spAutoFit/>
+          </a:bodyPr>
+          <a:lstStyle/>
+          <a:p>
+            <a:r>
+              <a:rPr sz="1200" b="1" i="0">
+                <a:solidFill>
+                  <a:srgbClr val="006E96"/>
+                </a:solidFill>
+                <a:latin typeface="Arial"/>
+              </a:rPr>
+              <a:t>WHERE WE START</a:t>
+            </a:r>
+          </a:p>
+        </p:txBody>
+      </p:sp>
+      <p:sp>
+        <p:nvSpPr>
+          <p:cNvPr id="3" name="TextBox 2"/>
+          <p:cNvSpPr txBox="1"/>
+          <p:nvPr/>
+        </p:nvSpPr>
+        <p:spPr>
+          <a:xfrm>
+            <a:off x="1005840" y="1783080"/>
+            <a:ext cx="10149840" cy="1737360"/>
+          </a:xfrm>
+          <a:prstGeom prst="rect">
+            <a:avLst/>
+          </a:prstGeom>
+          <a:noFill/>
+        </p:spPr>
+        <p:txBody>
+          <a:bodyPr wrap="square">
+            <a:spAutoFit/>
+          </a:bodyPr>
+          <a:lstStyle/>
+          <a:p>
+            <a:r>
+              <a:rPr sz="3000" b="1" i="0">
+                <a:solidFill>
+                  <a:srgbClr val="1A1A1A"/>
+                </a:solidFill>
+                <a:latin typeface="Arial"/>
+              </a:rPr>
+              <a:t>Put the four layers on a real sector.</a:t>
+            </a:r>
+          </a:p>
+        </p:txBody>
+      </p:sp>
+      <p:sp>
+        <p:nvSpPr>
+          <p:cNvPr id="4" name="TextBox 3"/>
+          <p:cNvSpPr txBox="1"/>
+          <p:nvPr/>
+        </p:nvSpPr>
+        <p:spPr>
+          <a:xfrm>
+            <a:off x="1005840" y="3611880"/>
+            <a:ext cx="10149840" cy="2377440"/>
+          </a:xfrm>
+          <a:prstGeom prst="rect">
+            <a:avLst/>
+          </a:prstGeom>
+          <a:noFill/>
+        </p:spPr>
+        <p:txBody>
+          <a:bodyPr wrap="square">
+            <a:spAutoFit/>
+          </a:bodyPr>
+          <a:lstStyle/>
+          <a:p>
+            <a:pPr>
+              <a:spcAft>
+                <a:spcPts val="800"/>
+              </a:spcAft>
+            </a:pPr>
+            <a:r>
+              <a:rPr sz="1700" b="0" i="0">
+                <a:solidFill>
+                  <a:srgbClr val="595959"/>
+                </a:solidFill>
+                <a:latin typeface="Arial"/>
+              </a:rPr>
+              <a:t>Progressa — a demonstration country with an education system like many across the continent.</a:t>
+            </a:r>
+          </a:p>
+          <a:p>
+            <a:pPr>
+              <a:spcAft>
+                <a:spcPts val="800"/>
+              </a:spcAft>
+            </a:pPr>
+            <a:r>
+              <a:rPr sz="1700" b="0" i="0">
+                <a:solidFill>
+                  <a:srgbClr val="595959"/>
+                </a:solidFill>
+                <a:latin typeface="Arial"/>
+              </a:rPr>
+              <a:t>A ministry, an examination authority, a learner registry, an identity authority,</a:t>
+            </a:r>
+          </a:p>
+          <a:p>
+            <a:pPr>
+              <a:spcAft>
+                <a:spcPts val="800"/>
+              </a:spcAft>
+            </a:pPr>
+            <a:r>
+              <a:rPr sz="1700" b="0" i="0">
+                <a:solidFill>
+                  <a:srgbClr val="595959"/>
+                </a:solidFill>
+                <a:latin typeface="Arial"/>
+              </a:rPr>
+              <a:t>and a digital government authority running shared platforms.</a:t>
+            </a:r>
+          </a:p>
+        </p:txBody>
+      </p:sp>
+      <p:sp>
+        <p:nvSpPr>
+          <p:cNvPr id="5" name="TextBox 4"/>
+          <p:cNvSpPr txBox="1"/>
+          <p:nvPr/>
+        </p:nvSpPr>
+        <p:spPr>
+          <a:xfrm>
+            <a:off x="457200" y="6473952"/>
+            <a:ext cx="7772400" cy="292608"/>
+          </a:xfrm>
+          <a:prstGeom prst="rect">
+            <a:avLst/>
+          </a:prstGeom>
+          <a:noFill/>
+        </p:spPr>
+        <p:txBody>
+          <a:bodyPr wrap="square">
+            <a:spAutoFit/>
+          </a:bodyPr>
+          <a:lstStyle/>
+          <a:p>
+            <a:r>
+              <a:rPr sz="900" b="0" i="0">
+                <a:solidFill>
+                  <a:srgbClr val="595959"/>
+                </a:solidFill>
+                <a:latin typeface="Arial"/>
+              </a:rPr>
+              <a:t>2.5 · BDAT on a real ministry — the Progressa walkthrough</a:t>
+            </a:r>
+          </a:p>
+        </p:txBody>
+      </p:sp>
+      <p:sp>
+        <p:nvSpPr>
+          <p:cNvPr id="6" name="TextBox 5"/>
+          <p:cNvSpPr txBox="1"/>
+          <p:nvPr/>
+        </p:nvSpPr>
+        <p:spPr>
+          <a:xfrm>
+            <a:off x="10058400" y="6473952"/>
+            <a:ext cx="1673352" cy="292608"/>
+          </a:xfrm>
+          <a:prstGeom prst="rect">
+            <a:avLst/>
+          </a:prstGeom>
+          <a:noFill/>
+        </p:spPr>
+        <p:txBody>
+          <a:bodyPr wrap="square">
+            <a:spAutoFit/>
+          </a:bodyPr>
+          <a:lstStyle/>
+          <a:p>
+            <a:pPr algn="r"/>
+            <a:r>
+              <a:rPr sz="900" b="0" i="0">
+                <a:solidFill>
+                  <a:srgbClr val="595959"/>
+                </a:solidFill>
+                <a:latin typeface="Arial"/>
+              </a:rPr>
+              <a:t>www.itu.int</a:t>
+            </a:r>
+          </a:p>
+        </p:txBody>
+      </p:sp>
+    </p:spTree>
+  </p:cSld>
+  <p:clrMapOvr>
+    <a:masterClrMapping/>
+  </p:clrMapOvr>
+</p:sld>
+</file>
+
+<file path=ppt/slides/slide38.xml><?xml version="1.0" encoding="utf-8"?>
+<p:sld xmlns:a="http://schemas.openxmlformats.org/drawingml/2006/main" xmlns:p="http://schemas.openxmlformats.org/presentationml/2006/main" xmlns:r="http://schemas.openxmlformats.org/officeDocument/2006/relationships">
+  <p:cSld>
+    <p:spTree>
+      <p:nvGrpSpPr>
+        <p:cNvPr id="1" name=""/>
+        <p:cNvGrpSpPr/>
+        <p:nvPr/>
+      </p:nvGrpSpPr>
+      <p:grpSpPr/>
+      <p:sp>
+        <p:nvSpPr>
+          <p:cNvPr id="2" name="Rectangle 1"/>
+          <p:cNvSpPr/>
+          <p:nvPr/>
+        </p:nvSpPr>
+        <p:spPr>
+          <a:xfrm>
+            <a:off x="457200" y="384048"/>
+            <a:ext cx="45720" cy="256032"/>
+          </a:xfrm>
+          <a:prstGeom prst="rect">
+            <a:avLst/>
+          </a:prstGeom>
+          <a:solidFill>
+            <a:srgbClr val="009CD6"/>
+          </a:solidFill>
+          <a:ln>
+            <a:noFill/>
+          </a:ln>
+          <a:effectLst/>
+        </p:spPr>
+        <p:style>
+          <a:lnRef idx="1">
+            <a:schemeClr val="accent1"/>
+          </a:lnRef>
+          <a:fillRef idx="3">
+            <a:schemeClr val="accent1"/>
+          </a:fillRef>
+          <a:effectRef idx="2">
+            <a:schemeClr val="accent1"/>
+          </a:effectRef>
+          <a:fontRef idx="minor">
+            <a:schemeClr val="lt1"/>
+          </a:fontRef>
+        </p:style>
+        <p:txBody>
+          <a:bodyPr rtlCol="0" anchor="ctr"/>
+          <a:lstStyle/>
+          <a:p>
+            <a:pPr algn="ctr"/>
+          </a:p>
+        </p:txBody>
+      </p:sp>
+      <p:sp>
+        <p:nvSpPr>
+          <p:cNvPr id="3" name="TextBox 2"/>
+          <p:cNvSpPr txBox="1"/>
+          <p:nvPr/>
+        </p:nvSpPr>
+        <p:spPr>
+          <a:xfrm>
+            <a:off x="621792" y="274320"/>
+            <a:ext cx="11247120" cy="914400"/>
+          </a:xfrm>
+          <a:prstGeom prst="rect">
+            <a:avLst/>
+          </a:prstGeom>
+          <a:noFill/>
+        </p:spPr>
+        <p:txBody>
+          <a:bodyPr wrap="square">
+            <a:spAutoFit/>
+          </a:bodyPr>
+          <a:lstStyle/>
+          <a:p>
+            <a:r>
+              <a:rPr sz="2800" b="1" i="0">
+                <a:solidFill>
+                  <a:srgbClr val="1A1A1A"/>
+                </a:solidFill>
+                <a:latin typeface="Arial"/>
+              </a:rPr>
+              <a:t>Classify the bodies first — that is where the head start comes from</a:t>
+            </a:r>
+          </a:p>
+        </p:txBody>
+      </p:sp>
+      <p:sp>
+        <p:nvSpPr>
+          <p:cNvPr id="4" name="TextBox 3"/>
+          <p:cNvSpPr txBox="1"/>
+          <p:nvPr/>
+        </p:nvSpPr>
+        <p:spPr>
+          <a:xfrm>
+            <a:off x="658368" y="1417320"/>
+            <a:ext cx="10984687" cy="923544"/>
+          </a:xfrm>
+          <a:prstGeom prst="rect">
+            <a:avLst/>
+          </a:prstGeom>
+          <a:noFill/>
+        </p:spPr>
+        <p:txBody>
+          <a:bodyPr wrap="square">
+            <a:spAutoFit/>
+          </a:bodyPr>
+          <a:lstStyle/>
+          <a:p>
+            <a:pPr>
+              <a:spcAft>
+                <a:spcPts val="300"/>
+              </a:spcAft>
+            </a:pPr>
+            <a:r>
+              <a:rPr sz="1700" b="1" i="0">
+                <a:solidFill>
+                  <a:srgbClr val="1A1A1A"/>
+                </a:solidFill>
+                <a:latin typeface="Arial"/>
+              </a:rPr>
+              <a:t>Ministry of Education, Youth and Sport (MoEYS)</a:t>
+            </a:r>
+          </a:p>
+          <a:p>
+            <a:pPr>
+              <a:spcAft>
+                <a:spcPts val="300"/>
+              </a:spcAft>
+            </a:pPr>
+            <a:r>
+              <a:rPr sz="1450" b="0" i="0">
+                <a:solidFill>
+                  <a:srgbClr val="595959"/>
+                </a:solidFill>
+                <a:latin typeface="Arial"/>
+              </a:rPr>
+              <a:t>Policy unit — sets education policy, owns the rules.</a:t>
+            </a:r>
+          </a:p>
+        </p:txBody>
+      </p:sp>
+      <p:sp>
+        <p:nvSpPr>
+          <p:cNvPr id="5" name="Rectangle 4"/>
+          <p:cNvSpPr/>
+          <p:nvPr/>
+        </p:nvSpPr>
+        <p:spPr>
+          <a:xfrm>
+            <a:off x="621792" y="2345436"/>
+            <a:ext cx="10881360" cy="12700"/>
+          </a:xfrm>
+          <a:prstGeom prst="rect">
+            <a:avLst/>
+          </a:prstGeom>
+          <a:solidFill>
+            <a:srgbClr val="DDECF4"/>
+          </a:solidFill>
+          <a:ln>
+            <a:noFill/>
+          </a:ln>
+          <a:effectLst/>
+        </p:spPr>
+        <p:style>
+          <a:lnRef idx="1">
+            <a:schemeClr val="accent1"/>
+          </a:lnRef>
+          <a:fillRef idx="3">
+            <a:schemeClr val="accent1"/>
+          </a:fillRef>
+          <a:effectRef idx="2">
+            <a:schemeClr val="accent1"/>
+          </a:effectRef>
+          <a:fontRef idx="minor">
+            <a:schemeClr val="lt1"/>
+          </a:fontRef>
+        </p:style>
+        <p:txBody>
+          <a:bodyPr rtlCol="0" anchor="ctr"/>
+          <a:lstStyle/>
+          <a:p>
+            <a:pPr algn="ctr"/>
+          </a:p>
+        </p:txBody>
+      </p:sp>
+      <p:sp>
+        <p:nvSpPr>
+          <p:cNvPr id="6" name="TextBox 5"/>
+          <p:cNvSpPr txBox="1"/>
+          <p:nvPr/>
+        </p:nvSpPr>
+        <p:spPr>
+          <a:xfrm>
+            <a:off x="658368" y="2386584"/>
+            <a:ext cx="10984687" cy="923544"/>
+          </a:xfrm>
+          <a:prstGeom prst="rect">
+            <a:avLst/>
+          </a:prstGeom>
+          <a:noFill/>
+        </p:spPr>
+        <p:txBody>
+          <a:bodyPr wrap="square">
+            <a:spAutoFit/>
+          </a:bodyPr>
+          <a:lstStyle/>
+          <a:p>
+            <a:pPr>
+              <a:spcAft>
+                <a:spcPts val="300"/>
+              </a:spcAft>
+            </a:pPr>
+            <a:r>
+              <a:rPr sz="1700" b="1" i="0">
+                <a:solidFill>
+                  <a:srgbClr val="1A1A1A"/>
+                </a:solidFill>
+                <a:latin typeface="Arial"/>
+              </a:rPr>
+              <a:t>National Examination Authority (PNEA)</a:t>
+            </a:r>
+          </a:p>
+          <a:p>
+            <a:pPr>
+              <a:spcAft>
+                <a:spcPts val="300"/>
+              </a:spcAft>
+            </a:pPr>
+            <a:r>
+              <a:rPr sz="1450" b="0" i="0">
+                <a:solidFill>
+                  <a:srgbClr val="595959"/>
+                </a:solidFill>
+                <a:latin typeface="Arial"/>
+              </a:rPr>
+              <a:t>Service-delivery authority with a regulatory edge — runs examinations at scale, certifies results.</a:t>
+            </a:r>
+          </a:p>
+        </p:txBody>
+      </p:sp>
+      <p:sp>
+        <p:nvSpPr>
+          <p:cNvPr id="7" name="Rectangle 6"/>
+          <p:cNvSpPr/>
+          <p:nvPr/>
+        </p:nvSpPr>
+        <p:spPr>
+          <a:xfrm>
+            <a:off x="621792" y="3314700"/>
+            <a:ext cx="10881360" cy="12700"/>
+          </a:xfrm>
+          <a:prstGeom prst="rect">
+            <a:avLst/>
+          </a:prstGeom>
+          <a:solidFill>
+            <a:srgbClr val="DDECF4"/>
+          </a:solidFill>
+          <a:ln>
+            <a:noFill/>
+          </a:ln>
+          <a:effectLst/>
+        </p:spPr>
+        <p:style>
+          <a:lnRef idx="1">
+            <a:schemeClr val="accent1"/>
+          </a:lnRef>
+          <a:fillRef idx="3">
+            <a:schemeClr val="accent1"/>
+          </a:fillRef>
+          <a:effectRef idx="2">
+            <a:schemeClr val="accent1"/>
+          </a:effectRef>
+          <a:fontRef idx="minor">
+            <a:schemeClr val="lt1"/>
+          </a:fontRef>
+        </p:style>
+        <p:txBody>
+          <a:bodyPr rtlCol="0" anchor="ctr"/>
+          <a:lstStyle/>
+          <a:p>
+            <a:pPr algn="ctr"/>
+          </a:p>
+        </p:txBody>
+      </p:sp>
+      <p:sp>
+        <p:nvSpPr>
+          <p:cNvPr id="8" name="TextBox 7"/>
+          <p:cNvSpPr txBox="1"/>
+          <p:nvPr/>
+        </p:nvSpPr>
+        <p:spPr>
+          <a:xfrm>
+            <a:off x="658368" y="3355848"/>
+            <a:ext cx="10984687" cy="923544"/>
+          </a:xfrm>
+          <a:prstGeom prst="rect">
+            <a:avLst/>
+          </a:prstGeom>
+          <a:noFill/>
+        </p:spPr>
+        <p:txBody>
+          <a:bodyPr wrap="square">
+            <a:spAutoFit/>
+          </a:bodyPr>
+          <a:lstStyle/>
+          <a:p>
+            <a:pPr>
+              <a:spcAft>
+                <a:spcPts val="300"/>
+              </a:spcAft>
+            </a:pPr>
+            <a:r>
+              <a:rPr sz="1700" b="1" i="0">
+                <a:solidFill>
+                  <a:srgbClr val="1A1A1A"/>
+                </a:solidFill>
+                <a:latin typeface="Arial"/>
+              </a:rPr>
+              <a:t>Learner Registry (PLR)</a:t>
+            </a:r>
+          </a:p>
+          <a:p>
+            <a:pPr>
+              <a:spcAft>
+                <a:spcPts val="300"/>
+              </a:spcAft>
+            </a:pPr>
+            <a:r>
+              <a:rPr sz="1450" b="0" i="0">
+                <a:solidFill>
+                  <a:srgbClr val="595959"/>
+                </a:solidFill>
+                <a:latin typeface="Arial"/>
+              </a:rPr>
+              <a:t>State registry — the authoritative single source for who is a learner.</a:t>
+            </a:r>
+          </a:p>
+        </p:txBody>
+      </p:sp>
+      <p:sp>
+        <p:nvSpPr>
+          <p:cNvPr id="9" name="Rectangle 8"/>
+          <p:cNvSpPr/>
+          <p:nvPr/>
+        </p:nvSpPr>
+        <p:spPr>
+          <a:xfrm>
+            <a:off x="621792" y="4283964"/>
+            <a:ext cx="10881360" cy="12700"/>
+          </a:xfrm>
+          <a:prstGeom prst="rect">
+            <a:avLst/>
+          </a:prstGeom>
+          <a:solidFill>
+            <a:srgbClr val="DDECF4"/>
+          </a:solidFill>
+          <a:ln>
+            <a:noFill/>
+          </a:ln>
+          <a:effectLst/>
+        </p:spPr>
+        <p:style>
+          <a:lnRef idx="1">
+            <a:schemeClr val="accent1"/>
+          </a:lnRef>
+          <a:fillRef idx="3">
+            <a:schemeClr val="accent1"/>
+          </a:fillRef>
+          <a:effectRef idx="2">
+            <a:schemeClr val="accent1"/>
+          </a:effectRef>
+          <a:fontRef idx="minor">
+            <a:schemeClr val="lt1"/>
+          </a:fontRef>
+        </p:style>
+        <p:txBody>
+          <a:bodyPr rtlCol="0" anchor="ctr"/>
+          <a:lstStyle/>
+          <a:p>
+            <a:pPr algn="ctr"/>
+          </a:p>
+        </p:txBody>
+      </p:sp>
+      <p:sp>
+        <p:nvSpPr>
+          <p:cNvPr id="10" name="TextBox 9"/>
+          <p:cNvSpPr txBox="1"/>
+          <p:nvPr/>
+        </p:nvSpPr>
+        <p:spPr>
+          <a:xfrm>
+            <a:off x="658368" y="4325112"/>
+            <a:ext cx="10984687" cy="923544"/>
+          </a:xfrm>
+          <a:prstGeom prst="rect">
+            <a:avLst/>
+          </a:prstGeom>
+          <a:noFill/>
+        </p:spPr>
+        <p:txBody>
+          <a:bodyPr wrap="square">
+            <a:spAutoFit/>
+          </a:bodyPr>
+          <a:lstStyle/>
+          <a:p>
+            <a:pPr>
+              <a:spcAft>
+                <a:spcPts val="300"/>
+              </a:spcAft>
+            </a:pPr>
+            <a:r>
+              <a:rPr sz="1700" b="1" i="0">
+                <a:solidFill>
+                  <a:srgbClr val="1A1A1A"/>
+                </a:solidFill>
+                <a:latin typeface="Arial"/>
+              </a:rPr>
+              <a:t>National Identity Authority (PNIA)</a:t>
+            </a:r>
+          </a:p>
+          <a:p>
+            <a:pPr>
+              <a:spcAft>
+                <a:spcPts val="300"/>
+              </a:spcAft>
+            </a:pPr>
+            <a:r>
+              <a:rPr sz="1450" b="0" i="0">
+                <a:solidFill>
+                  <a:srgbClr val="595959"/>
+                </a:solidFill>
+                <a:latin typeface="Arial"/>
+              </a:rPr>
+              <a:t>State registry and shared platform — owns the person identity every sector reuses.</a:t>
+            </a:r>
+          </a:p>
+        </p:txBody>
+      </p:sp>
+      <p:sp>
+        <p:nvSpPr>
+          <p:cNvPr id="11" name="Rectangle 10"/>
+          <p:cNvSpPr/>
+          <p:nvPr/>
+        </p:nvSpPr>
+        <p:spPr>
+          <a:xfrm>
+            <a:off x="621792" y="5253228"/>
+            <a:ext cx="10881360" cy="12700"/>
+          </a:xfrm>
+          <a:prstGeom prst="rect">
+            <a:avLst/>
+          </a:prstGeom>
+          <a:solidFill>
+            <a:srgbClr val="DDECF4"/>
+          </a:solidFill>
+          <a:ln>
+            <a:noFill/>
+          </a:ln>
+          <a:effectLst/>
+        </p:spPr>
+        <p:style>
+          <a:lnRef idx="1">
+            <a:schemeClr val="accent1"/>
+          </a:lnRef>
+          <a:fillRef idx="3">
+            <a:schemeClr val="accent1"/>
+          </a:fillRef>
+          <a:effectRef idx="2">
+            <a:schemeClr val="accent1"/>
+          </a:effectRef>
+          <a:fontRef idx="minor">
+            <a:schemeClr val="lt1"/>
+          </a:fontRef>
+        </p:style>
+        <p:txBody>
+          <a:bodyPr rtlCol="0" anchor="ctr"/>
+          <a:lstStyle/>
+          <a:p>
+            <a:pPr algn="ctr"/>
+          </a:p>
+        </p:txBody>
+      </p:sp>
+      <p:sp>
+        <p:nvSpPr>
+          <p:cNvPr id="12" name="TextBox 11"/>
+          <p:cNvSpPr txBox="1"/>
+          <p:nvPr/>
+        </p:nvSpPr>
+        <p:spPr>
+          <a:xfrm>
+            <a:off x="658368" y="5294376"/>
+            <a:ext cx="10984687" cy="923544"/>
+          </a:xfrm>
+          <a:prstGeom prst="rect">
+            <a:avLst/>
+          </a:prstGeom>
+          <a:noFill/>
+        </p:spPr>
+        <p:txBody>
+          <a:bodyPr wrap="square">
+            <a:spAutoFit/>
+          </a:bodyPr>
+          <a:lstStyle/>
+          <a:p>
+            <a:pPr>
+              <a:spcAft>
+                <a:spcPts val="300"/>
+              </a:spcAft>
+            </a:pPr>
+            <a:r>
+              <a:rPr sz="1700" b="1" i="0">
+                <a:solidFill>
+                  <a:srgbClr val="1A1A1A"/>
+                </a:solidFill>
+                <a:latin typeface="Arial"/>
+              </a:rPr>
+              <a:t>Digital Government Authority (PDGA)</a:t>
+            </a:r>
+          </a:p>
+          <a:p>
+            <a:pPr>
+              <a:spcAft>
+                <a:spcPts val="300"/>
+              </a:spcAft>
+            </a:pPr>
+            <a:r>
+              <a:rPr sz="1450" b="0" i="0">
+                <a:solidFill>
+                  <a:srgbClr val="595959"/>
+                </a:solidFill>
+                <a:latin typeface="Arial"/>
+              </a:rPr>
+              <a:t>Shared-platform provider — data exchange and payments.</a:t>
+            </a:r>
+          </a:p>
+        </p:txBody>
+      </p:sp>
+      <p:sp>
+        <p:nvSpPr>
+          <p:cNvPr id="13" name="TextBox 12"/>
+          <p:cNvSpPr txBox="1"/>
+          <p:nvPr/>
+        </p:nvSpPr>
+        <p:spPr>
+          <a:xfrm>
+            <a:off x="457200" y="6473952"/>
+            <a:ext cx="7772400" cy="292608"/>
+          </a:xfrm>
+          <a:prstGeom prst="rect">
+            <a:avLst/>
+          </a:prstGeom>
+          <a:noFill/>
+        </p:spPr>
+        <p:txBody>
+          <a:bodyPr wrap="square">
+            <a:spAutoFit/>
+          </a:bodyPr>
+          <a:lstStyle/>
+          <a:p>
+            <a:r>
+              <a:rPr sz="900" b="0" i="0">
+                <a:solidFill>
+                  <a:srgbClr val="595959"/>
+                </a:solidFill>
+                <a:latin typeface="Arial"/>
+              </a:rPr>
+              <a:t>2.5 · BDAT on a real ministry — the Progressa walkthrough</a:t>
+            </a:r>
+          </a:p>
+        </p:txBody>
+      </p:sp>
+    </p:spTree>
+  </p:cSld>
+  <p:clrMapOvr>
+    <a:masterClrMapping/>
+  </p:clrMapOvr>
+</p:sld>
+</file>
+
+<file path=ppt/slides/slide39.xml><?xml version="1.0" encoding="utf-8"?>
+<p:sld xmlns:a="http://schemas.openxmlformats.org/drawingml/2006/main" xmlns:p="http://schemas.openxmlformats.org/presentationml/2006/main" xmlns:r="http://schemas.openxmlformats.org/officeDocument/2006/relationships">
+  <p:cSld>
+    <p:spTree>
+      <p:nvGrpSpPr>
+        <p:cNvPr id="1" name=""/>
+        <p:cNvGrpSpPr/>
+        <p:nvPr/>
+      </p:nvGrpSpPr>
+      <p:grpSpPr/>
+      <p:sp>
+        <p:nvSpPr>
+          <p:cNvPr id="2" name="Rectangle 1"/>
+          <p:cNvSpPr/>
+          <p:nvPr/>
+        </p:nvSpPr>
+        <p:spPr>
+          <a:xfrm>
+            <a:off x="457200" y="384048"/>
+            <a:ext cx="45720" cy="256032"/>
+          </a:xfrm>
+          <a:prstGeom prst="rect">
+            <a:avLst/>
+          </a:prstGeom>
+          <a:solidFill>
+            <a:srgbClr val="009CD6"/>
+          </a:solidFill>
+          <a:ln>
+            <a:noFill/>
+          </a:ln>
+          <a:effectLst/>
+        </p:spPr>
+        <p:style>
+          <a:lnRef idx="1">
+            <a:schemeClr val="accent1"/>
+          </a:lnRef>
+          <a:fillRef idx="3">
+            <a:schemeClr val="accent1"/>
+          </a:fillRef>
+          <a:effectRef idx="2">
+            <a:schemeClr val="accent1"/>
+          </a:effectRef>
+          <a:fontRef idx="minor">
+            <a:schemeClr val="lt1"/>
+          </a:fontRef>
+        </p:style>
+        <p:txBody>
+          <a:bodyPr rtlCol="0" anchor="ctr"/>
+          <a:lstStyle/>
+          <a:p>
+            <a:pPr algn="ctr"/>
+          </a:p>
+        </p:txBody>
+      </p:sp>
+      <p:sp>
+        <p:nvSpPr>
+          <p:cNvPr id="3" name="TextBox 2"/>
+          <p:cNvSpPr txBox="1"/>
+          <p:nvPr/>
+        </p:nvSpPr>
+        <p:spPr>
+          <a:xfrm>
+            <a:off x="621792" y="274320"/>
+            <a:ext cx="11247120" cy="914400"/>
+          </a:xfrm>
+          <a:prstGeom prst="rect">
+            <a:avLst/>
+          </a:prstGeom>
+          <a:noFill/>
+        </p:spPr>
+        <p:txBody>
+          <a:bodyPr wrap="square">
+            <a:spAutoFit/>
+          </a:bodyPr>
+          <a:lstStyle/>
+          <a:p>
+            <a:r>
+              <a:rPr sz="2800" b="1" i="0">
+                <a:solidFill>
+                  <a:srgbClr val="1A1A1A"/>
+                </a:solidFill>
+                <a:latin typeface="Arial"/>
+              </a:rPr>
+              <a:t>Business layer — capabilities belong to bodies, services sit on top</a:t>
+            </a:r>
+          </a:p>
+        </p:txBody>
+      </p:sp>
+      <p:sp>
+        <p:nvSpPr>
+          <p:cNvPr id="4" name="Rounded Rectangle 3"/>
+          <p:cNvSpPr/>
+          <p:nvPr/>
+        </p:nvSpPr>
+        <p:spPr>
+          <a:xfrm>
+            <a:off x="658368" y="1554480"/>
+            <a:ext cx="5394960" cy="3977639"/>
+          </a:xfrm>
+          <a:prstGeom prst="roundRect">
+            <a:avLst>
+              <a:gd name="adj" fmla="val 4500"/>
+            </a:avLst>
+          </a:prstGeom>
+          <a:solidFill>
+            <a:srgbClr val="E5F5FB"/>
+          </a:solidFill>
+          <a:ln>
+            <a:noFill/>
+          </a:ln>
+          <a:effectLst/>
+        </p:spPr>
+        <p:style>
+          <a:lnRef idx="1">
+            <a:schemeClr val="accent1"/>
+          </a:lnRef>
+          <a:fillRef idx="3">
+            <a:schemeClr val="accent1"/>
+          </a:fillRef>
+          <a:effectRef idx="2">
+            <a:schemeClr val="accent1"/>
+          </a:effectRef>
+          <a:fontRef idx="minor">
+            <a:schemeClr val="lt1"/>
+          </a:fontRef>
+        </p:style>
+        <p:txBody>
+          <a:bodyPr rtlCol="0" anchor="ctr"/>
+          <a:lstStyle/>
+          <a:p>
+            <a:pPr algn="ctr"/>
+          </a:p>
+        </p:txBody>
+      </p:sp>
+      <p:sp>
+        <p:nvSpPr>
+          <p:cNvPr id="5" name="TextBox 4"/>
+          <p:cNvSpPr txBox="1"/>
+          <p:nvPr/>
+        </p:nvSpPr>
+        <p:spPr>
+          <a:xfrm>
+            <a:off x="859536" y="1700784"/>
+            <a:ext cx="4992624" cy="3703320"/>
+          </a:xfrm>
+          <a:prstGeom prst="rect">
+            <a:avLst/>
+          </a:prstGeom>
+          <a:noFill/>
+        </p:spPr>
+        <p:txBody>
+          <a:bodyPr wrap="square">
+            <a:spAutoFit/>
+          </a:bodyPr>
+          <a:lstStyle/>
+          <a:p>
+            <a:pPr>
+              <a:spcAft>
+                <a:spcPts val="700"/>
+              </a:spcAft>
+            </a:pPr>
+            <a:r>
+              <a:rPr sz="1900" b="1" i="0">
+                <a:solidFill>
+                  <a:srgbClr val="006E96"/>
+                </a:solidFill>
+                <a:latin typeface="Arial"/>
+              </a:rPr>
+              <a:t>Capabilities</a:t>
+            </a:r>
+          </a:p>
+          <a:p>
+            <a:pPr>
+              <a:spcAft>
+                <a:spcPts val="700"/>
+              </a:spcAft>
+            </a:pPr>
+            <a:r>
+              <a:rPr sz="1600" b="0" i="0">
+                <a:solidFill>
+                  <a:srgbClr val="1A1A1A"/>
+                </a:solidFill>
+                <a:latin typeface="Arial"/>
+              </a:rPr>
+              <a:t>Register a learner — PLR</a:t>
+            </a:r>
+          </a:p>
+          <a:p>
+            <a:pPr>
+              <a:spcAft>
+                <a:spcPts val="700"/>
+              </a:spcAft>
+            </a:pPr>
+            <a:r>
+              <a:rPr sz="1600" b="0" i="0">
+                <a:solidFill>
+                  <a:srgbClr val="1A1A1A"/>
+                </a:solidFill>
+                <a:latin typeface="Arial"/>
+              </a:rPr>
+              <a:t>Run an examination, certify a result — PNEA</a:t>
+            </a:r>
+          </a:p>
+          <a:p>
+            <a:pPr>
+              <a:spcAft>
+                <a:spcPts val="700"/>
+              </a:spcAft>
+            </a:pPr>
+            <a:r>
+              <a:rPr sz="1600" b="0" i="0">
+                <a:solidFill>
+                  <a:srgbClr val="1A1A1A"/>
+                </a:solidFill>
+                <a:latin typeface="Arial"/>
+              </a:rPr>
+              <a:t>Prove identity — PNIA</a:t>
+            </a:r>
+          </a:p>
+          <a:p>
+            <a:pPr>
+              <a:spcAft>
+                <a:spcPts val="700"/>
+              </a:spcAft>
+            </a:pPr>
+            <a:r>
+              <a:rPr sz="1600" b="0" i="0">
+                <a:solidFill>
+                  <a:srgbClr val="1A1A1A"/>
+                </a:solidFill>
+                <a:latin typeface="Arial"/>
+              </a:rPr>
+              <a:t>Set policy, fund schools — MoEYS</a:t>
+            </a:r>
+          </a:p>
+        </p:txBody>
+      </p:sp>
+      <p:sp>
+        <p:nvSpPr>
+          <p:cNvPr id="6" name="Rounded Rectangle 5"/>
+          <p:cNvSpPr/>
+          <p:nvPr/>
+        </p:nvSpPr>
+        <p:spPr>
+          <a:xfrm>
+            <a:off x="6263640" y="1554480"/>
+            <a:ext cx="5394960" cy="3977639"/>
+          </a:xfrm>
+          <a:prstGeom prst="roundRect">
+            <a:avLst>
+              <a:gd name="adj" fmla="val 4500"/>
+            </a:avLst>
+          </a:prstGeom>
+          <a:solidFill>
+            <a:srgbClr val="F2F2F2"/>
+          </a:solidFill>
+          <a:ln>
+            <a:noFill/>
+          </a:ln>
+          <a:effectLst/>
+        </p:spPr>
+        <p:style>
+          <a:lnRef idx="1">
+            <a:schemeClr val="accent1"/>
+          </a:lnRef>
+          <a:fillRef idx="3">
+            <a:schemeClr val="accent1"/>
+          </a:fillRef>
+          <a:effectRef idx="2">
+            <a:schemeClr val="accent1"/>
+          </a:effectRef>
+          <a:fontRef idx="minor">
+            <a:schemeClr val="lt1"/>
+          </a:fontRef>
+        </p:style>
+        <p:txBody>
+          <a:bodyPr rtlCol="0" anchor="ctr"/>
+          <a:lstStyle/>
+          <a:p>
+            <a:pPr algn="ctr"/>
+          </a:p>
+        </p:txBody>
+      </p:sp>
+      <p:sp>
+        <p:nvSpPr>
+          <p:cNvPr id="7" name="TextBox 6"/>
+          <p:cNvSpPr txBox="1"/>
+          <p:nvPr/>
+        </p:nvSpPr>
+        <p:spPr>
+          <a:xfrm>
+            <a:off x="6464808" y="1700784"/>
+            <a:ext cx="4992624" cy="3703320"/>
+          </a:xfrm>
+          <a:prstGeom prst="rect">
+            <a:avLst/>
+          </a:prstGeom>
+          <a:noFill/>
+        </p:spPr>
+        <p:txBody>
+          <a:bodyPr wrap="square">
+            <a:spAutoFit/>
+          </a:bodyPr>
+          <a:lstStyle/>
+          <a:p>
+            <a:pPr>
+              <a:spcAft>
+                <a:spcPts val="700"/>
+              </a:spcAft>
+            </a:pPr>
+            <a:r>
+              <a:rPr sz="1900" b="1" i="0">
+                <a:solidFill>
+                  <a:srgbClr val="006E96"/>
+                </a:solidFill>
+                <a:latin typeface="Arial"/>
+              </a:rPr>
+              <a:t>Services</a:t>
+            </a:r>
+          </a:p>
+          <a:p>
+            <a:pPr>
+              <a:spcAft>
+                <a:spcPts val="700"/>
+              </a:spcAft>
+            </a:pPr>
+            <a:r>
+              <a:rPr sz="1600" b="0" i="0">
+                <a:solidFill>
+                  <a:srgbClr val="1A1A1A"/>
+                </a:solidFill>
+                <a:latin typeface="Arial"/>
+              </a:rPr>
+              <a:t>Enrol a child</a:t>
+            </a:r>
+          </a:p>
+          <a:p>
+            <a:pPr>
+              <a:spcAft>
+                <a:spcPts val="700"/>
+              </a:spcAft>
+            </a:pPr>
+            <a:r>
+              <a:rPr sz="1600" b="0" i="0">
+                <a:solidFill>
+                  <a:srgbClr val="1A1A1A"/>
+                </a:solidFill>
+                <a:latin typeface="Arial"/>
+              </a:rPr>
+              <a:t>Sit an examination</a:t>
+            </a:r>
+          </a:p>
+          <a:p>
+            <a:pPr>
+              <a:spcAft>
+                <a:spcPts val="700"/>
+              </a:spcAft>
+            </a:pPr>
+            <a:r>
+              <a:rPr sz="1600" b="0" i="0">
+                <a:solidFill>
+                  <a:srgbClr val="1A1A1A"/>
+                </a:solidFill>
+                <a:latin typeface="Arial"/>
+              </a:rPr>
+              <a:t>Receive a certificate</a:t>
+            </a:r>
+          </a:p>
+          <a:p>
+            <a:pPr>
+              <a:spcAft>
+                <a:spcPts val="700"/>
+              </a:spcAft>
+            </a:pPr>
+            <a:r>
+              <a:rPr sz="1600" b="0" i="0">
+                <a:solidFill>
+                  <a:srgbClr val="1A1A1A"/>
+                </a:solidFill>
+                <a:latin typeface="Arial"/>
+              </a:rPr>
+              <a:t>Transfer schools</a:t>
+            </a:r>
+          </a:p>
+        </p:txBody>
+      </p:sp>
+      <p:sp>
+        <p:nvSpPr>
+          <p:cNvPr id="8" name="TextBox 7"/>
+          <p:cNvSpPr txBox="1"/>
+          <p:nvPr/>
+        </p:nvSpPr>
+        <p:spPr>
+          <a:xfrm>
+            <a:off x="658368" y="5715000"/>
+            <a:ext cx="10881360" cy="548640"/>
+          </a:xfrm>
+          <a:prstGeom prst="rect">
+            <a:avLst/>
+          </a:prstGeom>
+          <a:noFill/>
+        </p:spPr>
+        <p:txBody>
+          <a:bodyPr wrap="square">
+            <a:spAutoFit/>
+          </a:bodyPr>
+          <a:lstStyle/>
+          <a:p>
+            <a:r>
+              <a:rPr sz="1550" b="1" i="0">
+                <a:solidFill>
+                  <a:srgbClr val="006E96"/>
+                </a:solidFill>
+                <a:latin typeface="Arial"/>
+              </a:rPr>
+              <a:t>Each service traces down to a capability owned by exactly one body. Two bodies claiming one capability is your first gap.</a:t>
+            </a:r>
+          </a:p>
+        </p:txBody>
+      </p:sp>
+      <p:sp>
+        <p:nvSpPr>
+          <p:cNvPr id="9" name="TextBox 8"/>
+          <p:cNvSpPr txBox="1"/>
+          <p:nvPr/>
+        </p:nvSpPr>
+        <p:spPr>
+          <a:xfrm>
+            <a:off x="457200" y="6473952"/>
+            <a:ext cx="7772400" cy="292608"/>
+          </a:xfrm>
+          <a:prstGeom prst="rect">
+            <a:avLst/>
+          </a:prstGeom>
+          <a:noFill/>
+        </p:spPr>
+        <p:txBody>
+          <a:bodyPr wrap="square">
+            <a:spAutoFit/>
+          </a:bodyPr>
+          <a:lstStyle/>
+          <a:p>
+            <a:r>
+              <a:rPr sz="900" b="0" i="0">
+                <a:solidFill>
+                  <a:srgbClr val="595959"/>
+                </a:solidFill>
+                <a:latin typeface="Arial"/>
+              </a:rPr>
+              <a:t>2.5 · BDAT on a real ministry — the Progressa walkthrough</a:t>
+            </a:r>
+          </a:p>
+        </p:txBody>
+      </p:sp>
+    </p:spTree>
+  </p:cSld>
+  <p:clrMapOvr>
+    <a:masterClrMapping/>
+  </p:clrMapOvr>
+</p:sld>
+</file>
+
+<file path=ppt/slides/slide40.xml><?xml version="1.0" encoding="utf-8"?>
+<p:sld xmlns:a="http://schemas.openxmlformats.org/drawingml/2006/main" xmlns:p="http://schemas.openxmlformats.org/presentationml/2006/main" xmlns:r="http://schemas.openxmlformats.org/officeDocument/2006/relationships">
+  <p:cSld>
+    <p:spTree>
+      <p:nvGrpSpPr>
+        <p:cNvPr id="1" name=""/>
+        <p:cNvGrpSpPr/>
+        <p:nvPr/>
+      </p:nvGrpSpPr>
+      <p:grpSpPr/>
+      <p:sp>
+        <p:nvSpPr>
+          <p:cNvPr id="2" name="Rectangle 1"/>
+          <p:cNvSpPr/>
+          <p:nvPr/>
+        </p:nvSpPr>
+        <p:spPr>
+          <a:xfrm>
+            <a:off x="457200" y="384048"/>
+            <a:ext cx="45720" cy="256032"/>
+          </a:xfrm>
+          <a:prstGeom prst="rect">
+            <a:avLst/>
+          </a:prstGeom>
+          <a:solidFill>
+            <a:srgbClr val="009CD6"/>
+          </a:solidFill>
+          <a:ln>
+            <a:noFill/>
+          </a:ln>
+          <a:effectLst/>
+        </p:spPr>
+        <p:style>
+          <a:lnRef idx="1">
+            <a:schemeClr val="accent1"/>
+          </a:lnRef>
+          <a:fillRef idx="3">
+            <a:schemeClr val="accent1"/>
+          </a:fillRef>
+          <a:effectRef idx="2">
+            <a:schemeClr val="accent1"/>
+          </a:effectRef>
+          <a:fontRef idx="minor">
+            <a:schemeClr val="lt1"/>
+          </a:fontRef>
+        </p:style>
+        <p:txBody>
+          <a:bodyPr rtlCol="0" anchor="ctr"/>
+          <a:lstStyle/>
+          <a:p>
+            <a:pPr algn="ctr"/>
+          </a:p>
+        </p:txBody>
+      </p:sp>
+      <p:sp>
+        <p:nvSpPr>
+          <p:cNvPr id="3" name="TextBox 2"/>
+          <p:cNvSpPr txBox="1"/>
+          <p:nvPr/>
+        </p:nvSpPr>
+        <p:spPr>
+          <a:xfrm>
+            <a:off x="621792" y="274320"/>
+            <a:ext cx="11247120" cy="914400"/>
+          </a:xfrm>
+          <a:prstGeom prst="rect">
+            <a:avLst/>
+          </a:prstGeom>
+          <a:noFill/>
+        </p:spPr>
+        <p:txBody>
+          <a:bodyPr wrap="square">
+            <a:spAutoFit/>
+          </a:bodyPr>
+          <a:lstStyle/>
+          <a:p>
+            <a:r>
+              <a:rPr sz="2800" b="1" i="0">
+                <a:solidFill>
+                  <a:srgbClr val="1A1A1A"/>
+                </a:solidFill>
+                <a:latin typeface="Arial"/>
+              </a:rPr>
+              <a:t>Data layer — one domain, one owner, one authoritative copy</a:t>
+            </a:r>
+          </a:p>
+        </p:txBody>
+      </p:sp>
+      <p:sp>
+        <p:nvSpPr>
+          <p:cNvPr id="4" name="TextBox 3"/>
+          <p:cNvSpPr txBox="1"/>
+          <p:nvPr/>
+        </p:nvSpPr>
+        <p:spPr>
+          <a:xfrm>
+            <a:off x="658368" y="1463040"/>
+            <a:ext cx="10984687" cy="777240"/>
+          </a:xfrm>
+          <a:prstGeom prst="rect">
+            <a:avLst/>
+          </a:prstGeom>
+          <a:noFill/>
+        </p:spPr>
+        <p:txBody>
+          <a:bodyPr wrap="square">
+            <a:spAutoFit/>
+          </a:bodyPr>
+          <a:lstStyle/>
+          <a:p>
+            <a:pPr>
+              <a:spcAft>
+                <a:spcPts val="300"/>
+              </a:spcAft>
+            </a:pPr>
+            <a:r>
+              <a:rPr sz="1900" b="1" i="0">
+                <a:solidFill>
+                  <a:srgbClr val="1A1A1A"/>
+                </a:solidFill>
+                <a:latin typeface="Arial"/>
+              </a:rPr>
+              <a:t>Person</a:t>
+            </a:r>
+          </a:p>
+          <a:p>
+            <a:pPr>
+              <a:spcAft>
+                <a:spcPts val="300"/>
+              </a:spcAft>
+            </a:pPr>
+            <a:r>
+              <a:rPr sz="1550" b="0" i="0">
+                <a:solidFill>
+                  <a:srgbClr val="595959"/>
+                </a:solidFill>
+                <a:latin typeface="Arial"/>
+              </a:rPr>
+              <a:t>Owned by PNIA. Everyone else uses the person identity; no one else mints it.</a:t>
+            </a:r>
+          </a:p>
+        </p:txBody>
+      </p:sp>
+      <p:sp>
+        <p:nvSpPr>
+          <p:cNvPr id="5" name="Rectangle 4"/>
+          <p:cNvSpPr/>
+          <p:nvPr/>
+        </p:nvSpPr>
+        <p:spPr>
+          <a:xfrm>
+            <a:off x="621792" y="2244852"/>
+            <a:ext cx="10881360" cy="12700"/>
+          </a:xfrm>
+          <a:prstGeom prst="rect">
+            <a:avLst/>
+          </a:prstGeom>
+          <a:solidFill>
+            <a:srgbClr val="DDECF4"/>
+          </a:solidFill>
+          <a:ln>
+            <a:noFill/>
+          </a:ln>
+          <a:effectLst/>
+        </p:spPr>
+        <p:style>
+          <a:lnRef idx="1">
+            <a:schemeClr val="accent1"/>
+          </a:lnRef>
+          <a:fillRef idx="3">
+            <a:schemeClr val="accent1"/>
+          </a:fillRef>
+          <a:effectRef idx="2">
+            <a:schemeClr val="accent1"/>
+          </a:effectRef>
+          <a:fontRef idx="minor">
+            <a:schemeClr val="lt1"/>
+          </a:fontRef>
+        </p:style>
+        <p:txBody>
+          <a:bodyPr rtlCol="0" anchor="ctr"/>
+          <a:lstStyle/>
+          <a:p>
+            <a:pPr algn="ctr"/>
+          </a:p>
+        </p:txBody>
+      </p:sp>
+      <p:sp>
+        <p:nvSpPr>
+          <p:cNvPr id="6" name="TextBox 5"/>
+          <p:cNvSpPr txBox="1"/>
+          <p:nvPr/>
+        </p:nvSpPr>
+        <p:spPr>
+          <a:xfrm>
+            <a:off x="658368" y="2286000"/>
+            <a:ext cx="10984687" cy="777240"/>
+          </a:xfrm>
+          <a:prstGeom prst="rect">
+            <a:avLst/>
+          </a:prstGeom>
+          <a:noFill/>
+        </p:spPr>
+        <p:txBody>
+          <a:bodyPr wrap="square">
+            <a:spAutoFit/>
+          </a:bodyPr>
+          <a:lstStyle/>
+          <a:p>
+            <a:pPr>
+              <a:spcAft>
+                <a:spcPts val="300"/>
+              </a:spcAft>
+            </a:pPr>
+            <a:r>
+              <a:rPr sz="1900" b="1" i="0">
+                <a:solidFill>
+                  <a:srgbClr val="1A1A1A"/>
+                </a:solidFill>
+                <a:latin typeface="Arial"/>
+              </a:rPr>
+              <a:t>Learner</a:t>
+            </a:r>
+          </a:p>
+          <a:p>
+            <a:pPr>
+              <a:spcAft>
+                <a:spcPts val="300"/>
+              </a:spcAft>
+            </a:pPr>
+            <a:r>
+              <a:rPr sz="1550" b="0" i="0">
+                <a:solidFill>
+                  <a:srgbClr val="595959"/>
+                </a:solidFill>
+                <a:latin typeface="Arial"/>
+              </a:rPr>
+              <a:t>Owned by PLR.</a:t>
+            </a:r>
+          </a:p>
+        </p:txBody>
+      </p:sp>
+      <p:sp>
+        <p:nvSpPr>
+          <p:cNvPr id="7" name="Rectangle 6"/>
+          <p:cNvSpPr/>
+          <p:nvPr/>
+        </p:nvSpPr>
+        <p:spPr>
+          <a:xfrm>
+            <a:off x="621792" y="3067812"/>
+            <a:ext cx="10881360" cy="12700"/>
+          </a:xfrm>
+          <a:prstGeom prst="rect">
+            <a:avLst/>
+          </a:prstGeom>
+          <a:solidFill>
+            <a:srgbClr val="DDECF4"/>
+          </a:solidFill>
+          <a:ln>
+            <a:noFill/>
+          </a:ln>
+          <a:effectLst/>
+        </p:spPr>
+        <p:style>
+          <a:lnRef idx="1">
+            <a:schemeClr val="accent1"/>
+          </a:lnRef>
+          <a:fillRef idx="3">
+            <a:schemeClr val="accent1"/>
+          </a:fillRef>
+          <a:effectRef idx="2">
+            <a:schemeClr val="accent1"/>
+          </a:effectRef>
+          <a:fontRef idx="minor">
+            <a:schemeClr val="lt1"/>
+          </a:fontRef>
+        </p:style>
+        <p:txBody>
+          <a:bodyPr rtlCol="0" anchor="ctr"/>
+          <a:lstStyle/>
+          <a:p>
+            <a:pPr algn="ctr"/>
+          </a:p>
+        </p:txBody>
+      </p:sp>
+      <p:sp>
+        <p:nvSpPr>
+          <p:cNvPr id="8" name="TextBox 7"/>
+          <p:cNvSpPr txBox="1"/>
+          <p:nvPr/>
+        </p:nvSpPr>
+        <p:spPr>
+          <a:xfrm>
+            <a:off x="658368" y="3108960"/>
+            <a:ext cx="10984687" cy="777240"/>
+          </a:xfrm>
+          <a:prstGeom prst="rect">
+            <a:avLst/>
+          </a:prstGeom>
+          <a:noFill/>
+        </p:spPr>
+        <p:txBody>
+          <a:bodyPr wrap="square">
+            <a:spAutoFit/>
+          </a:bodyPr>
+          <a:lstStyle/>
+          <a:p>
+            <a:pPr>
+              <a:spcAft>
+                <a:spcPts val="300"/>
+              </a:spcAft>
+            </a:pPr>
+            <a:r>
+              <a:rPr sz="1900" b="1" i="0">
+                <a:solidFill>
+                  <a:srgbClr val="1A1A1A"/>
+                </a:solidFill>
+                <a:latin typeface="Arial"/>
+              </a:rPr>
+              <a:t>Examination result</a:t>
+            </a:r>
+          </a:p>
+          <a:p>
+            <a:pPr>
+              <a:spcAft>
+                <a:spcPts val="300"/>
+              </a:spcAft>
+            </a:pPr>
+            <a:r>
+              <a:rPr sz="1550" b="0" i="0">
+                <a:solidFill>
+                  <a:srgbClr val="595959"/>
+                </a:solidFill>
+                <a:latin typeface="Arial"/>
+              </a:rPr>
+              <a:t>Owned by PNEA.</a:t>
+            </a:r>
+          </a:p>
+        </p:txBody>
+      </p:sp>
+      <p:sp>
+        <p:nvSpPr>
+          <p:cNvPr id="9" name="Rectangle 8"/>
+          <p:cNvSpPr/>
+          <p:nvPr/>
+        </p:nvSpPr>
+        <p:spPr>
+          <a:xfrm>
+            <a:off x="621792" y="3890772"/>
+            <a:ext cx="10881360" cy="12700"/>
+          </a:xfrm>
+          <a:prstGeom prst="rect">
+            <a:avLst/>
+          </a:prstGeom>
+          <a:solidFill>
+            <a:srgbClr val="DDECF4"/>
+          </a:solidFill>
+          <a:ln>
+            <a:noFill/>
+          </a:ln>
+          <a:effectLst/>
+        </p:spPr>
+        <p:style>
+          <a:lnRef idx="1">
+            <a:schemeClr val="accent1"/>
+          </a:lnRef>
+          <a:fillRef idx="3">
+            <a:schemeClr val="accent1"/>
+          </a:fillRef>
+          <a:effectRef idx="2">
+            <a:schemeClr val="accent1"/>
+          </a:effectRef>
+          <a:fontRef idx="minor">
+            <a:schemeClr val="lt1"/>
+          </a:fontRef>
+        </p:style>
+        <p:txBody>
+          <a:bodyPr rtlCol="0" anchor="ctr"/>
+          <a:lstStyle/>
+          <a:p>
+            <a:pPr algn="ctr"/>
+          </a:p>
+        </p:txBody>
+      </p:sp>
+      <p:sp>
+        <p:nvSpPr>
+          <p:cNvPr id="10" name="TextBox 9"/>
+          <p:cNvSpPr txBox="1"/>
+          <p:nvPr/>
+        </p:nvSpPr>
+        <p:spPr>
+          <a:xfrm>
+            <a:off x="658368" y="3931920"/>
+            <a:ext cx="10984687" cy="777240"/>
+          </a:xfrm>
+          <a:prstGeom prst="rect">
+            <a:avLst/>
+          </a:prstGeom>
+          <a:noFill/>
+        </p:spPr>
+        <p:txBody>
+          <a:bodyPr wrap="square">
+            <a:spAutoFit/>
+          </a:bodyPr>
+          <a:lstStyle/>
+          <a:p>
+            <a:pPr>
+              <a:spcAft>
+                <a:spcPts val="300"/>
+              </a:spcAft>
+            </a:pPr>
+            <a:r>
+              <a:rPr sz="1900" b="1" i="0">
+                <a:solidFill>
+                  <a:srgbClr val="1A1A1A"/>
+                </a:solidFill>
+                <a:latin typeface="Arial"/>
+              </a:rPr>
+              <a:t>School</a:t>
+            </a:r>
+          </a:p>
+          <a:p>
+            <a:pPr>
+              <a:spcAft>
+                <a:spcPts val="300"/>
+              </a:spcAft>
+            </a:pPr>
+            <a:r>
+              <a:rPr sz="1550" b="0" i="0">
+                <a:solidFill>
+                  <a:srgbClr val="595959"/>
+                </a:solidFill>
+                <a:latin typeface="Arial"/>
+              </a:rPr>
+              <a:t>Owned by MoEYS.</a:t>
+            </a:r>
+          </a:p>
+        </p:txBody>
+      </p:sp>
+      <p:sp>
+        <p:nvSpPr>
+          <p:cNvPr id="11" name="Rounded Rectangle 10"/>
+          <p:cNvSpPr/>
+          <p:nvPr/>
+        </p:nvSpPr>
+        <p:spPr>
+          <a:xfrm>
+            <a:off x="658368" y="4937760"/>
+            <a:ext cx="10881360" cy="1234440"/>
+          </a:xfrm>
+          <a:prstGeom prst="roundRect">
+            <a:avLst>
+              <a:gd name="adj" fmla="val 4500"/>
+            </a:avLst>
+          </a:prstGeom>
+          <a:solidFill>
+            <a:srgbClr val="009CD6"/>
+          </a:solidFill>
+          <a:ln>
+            <a:noFill/>
+          </a:ln>
+          <a:effectLst/>
+        </p:spPr>
+        <p:style>
+          <a:lnRef idx="1">
+            <a:schemeClr val="accent1"/>
+          </a:lnRef>
+          <a:fillRef idx="3">
+            <a:schemeClr val="accent1"/>
+          </a:fillRef>
+          <a:effectRef idx="2">
+            <a:schemeClr val="accent1"/>
+          </a:effectRef>
+          <a:fontRef idx="minor">
+            <a:schemeClr val="lt1"/>
+          </a:fontRef>
+        </p:style>
+        <p:txBody>
+          <a:bodyPr rtlCol="0" anchor="ctr"/>
+          <a:lstStyle/>
+          <a:p>
+            <a:pPr algn="ctr"/>
+          </a:p>
+        </p:txBody>
+      </p:sp>
+      <p:sp>
+        <p:nvSpPr>
+          <p:cNvPr id="12" name="TextBox 11"/>
+          <p:cNvSpPr txBox="1"/>
+          <p:nvPr/>
+        </p:nvSpPr>
+        <p:spPr>
+          <a:xfrm>
+            <a:off x="859536" y="5084064"/>
+            <a:ext cx="10479024" cy="960120"/>
+          </a:xfrm>
+          <a:prstGeom prst="rect">
+            <a:avLst/>
+          </a:prstGeom>
+          <a:noFill/>
+        </p:spPr>
+        <p:txBody>
+          <a:bodyPr wrap="square">
+            <a:spAutoFit/>
+          </a:bodyPr>
+          <a:lstStyle/>
+          <a:p>
+            <a:pPr>
+              <a:spcAft>
+                <a:spcPts val="700"/>
+              </a:spcAft>
+            </a:pPr>
+            <a:r>
+              <a:rPr sz="2000" b="1" i="0">
+                <a:solidFill>
+                  <a:srgbClr val="FFFFFF"/>
+                </a:solidFill>
+                <a:latin typeface="Arial"/>
+              </a:rPr>
+              <a:t>Once-only made concrete: others consume, they do not copy.</a:t>
+            </a:r>
+          </a:p>
+          <a:p>
+            <a:pPr>
+              <a:spcAft>
+                <a:spcPts val="700"/>
+              </a:spcAft>
+            </a:pPr>
+            <a:r>
+              <a:rPr sz="1500" b="0" i="0">
+                <a:solidFill>
+                  <a:srgbClr val="FFFFFF"/>
+                </a:solidFill>
+                <a:latin typeface="Arial"/>
+              </a:rPr>
+              <a:t>An examination authority keeping its own learner list is a duplicate registry — write it down.</a:t>
+            </a:r>
+          </a:p>
+        </p:txBody>
+      </p:sp>
+      <p:sp>
+        <p:nvSpPr>
+          <p:cNvPr id="13" name="TextBox 12"/>
+          <p:cNvSpPr txBox="1"/>
+          <p:nvPr/>
+        </p:nvSpPr>
+        <p:spPr>
+          <a:xfrm>
+            <a:off x="457200" y="6473952"/>
+            <a:ext cx="7772400" cy="292608"/>
+          </a:xfrm>
+          <a:prstGeom prst="rect">
+            <a:avLst/>
+          </a:prstGeom>
+          <a:noFill/>
+        </p:spPr>
+        <p:txBody>
+          <a:bodyPr wrap="square">
+            <a:spAutoFit/>
+          </a:bodyPr>
+          <a:lstStyle/>
+          <a:p>
+            <a:r>
+              <a:rPr sz="900" b="0" i="0">
+                <a:solidFill>
+                  <a:srgbClr val="595959"/>
+                </a:solidFill>
+                <a:latin typeface="Arial"/>
+              </a:rPr>
+              <a:t>2.5 · BDAT on a real ministry — the Progressa walkthrough</a:t>
+            </a:r>
+          </a:p>
+        </p:txBody>
+      </p:sp>
+    </p:spTree>
+  </p:cSld>
+  <p:clrMapOvr>
+    <a:masterClrMapping/>
+  </p:clrMapOvr>
+</p:sld>
+</file>
+
+<file path=ppt/slides/slide41.xml><?xml version="1.0" encoding="utf-8"?>
+<p:sld xmlns:a="http://schemas.openxmlformats.org/drawingml/2006/main" xmlns:p="http://schemas.openxmlformats.org/presentationml/2006/main" xmlns:r="http://schemas.openxmlformats.org/officeDocument/2006/relationships">
+  <p:cSld>
+    <p:spTree>
+      <p:nvGrpSpPr>
+        <p:cNvPr id="1" name=""/>
+        <p:cNvGrpSpPr/>
+        <p:nvPr/>
+      </p:nvGrpSpPr>
+      <p:grpSpPr/>
+      <p:sp>
+        <p:nvSpPr>
+          <p:cNvPr id="2" name="Rectangle 1"/>
+          <p:cNvSpPr/>
+          <p:nvPr/>
+        </p:nvSpPr>
+        <p:spPr>
+          <a:xfrm>
+            <a:off x="457200" y="384048"/>
+            <a:ext cx="45720" cy="256032"/>
+          </a:xfrm>
+          <a:prstGeom prst="rect">
+            <a:avLst/>
+          </a:prstGeom>
+          <a:solidFill>
+            <a:srgbClr val="009CD6"/>
+          </a:solidFill>
+          <a:ln>
+            <a:noFill/>
+          </a:ln>
+          <a:effectLst/>
+        </p:spPr>
+        <p:style>
+          <a:lnRef idx="1">
+            <a:schemeClr val="accent1"/>
+          </a:lnRef>
+          <a:fillRef idx="3">
+            <a:schemeClr val="accent1"/>
+          </a:fillRef>
+          <a:effectRef idx="2">
+            <a:schemeClr val="accent1"/>
+          </a:effectRef>
+          <a:fontRef idx="minor">
+            <a:schemeClr val="lt1"/>
+          </a:fontRef>
+        </p:style>
+        <p:txBody>
+          <a:bodyPr rtlCol="0" anchor="ctr"/>
+          <a:lstStyle/>
+          <a:p>
+            <a:pPr algn="ctr"/>
+          </a:p>
+        </p:txBody>
+      </p:sp>
+      <p:sp>
+        <p:nvSpPr>
+          <p:cNvPr id="3" name="TextBox 2"/>
+          <p:cNvSpPr txBox="1"/>
+          <p:nvPr/>
+        </p:nvSpPr>
+        <p:spPr>
+          <a:xfrm>
+            <a:off x="621792" y="274320"/>
+            <a:ext cx="11247120" cy="914400"/>
+          </a:xfrm>
+          <a:prstGeom prst="rect">
+            <a:avLst/>
+          </a:prstGeom>
+          <a:noFill/>
+        </p:spPr>
+        <p:txBody>
+          <a:bodyPr wrap="square">
+            <a:spAutoFit/>
+          </a:bodyPr>
+          <a:lstStyle/>
+          <a:p>
+            <a:r>
+              <a:rPr sz="2800" b="1" i="0">
+                <a:solidFill>
+                  <a:srgbClr val="1A1A1A"/>
+                </a:solidFill>
+                <a:latin typeface="Arial"/>
+              </a:rPr>
+              <a:t>Application and Technology — every system points up and across</a:t>
+            </a:r>
+          </a:p>
+        </p:txBody>
+      </p:sp>
+      <p:sp>
+        <p:nvSpPr>
+          <p:cNvPr id="4" name="Rounded Rectangle 3"/>
+          <p:cNvSpPr/>
+          <p:nvPr/>
+        </p:nvSpPr>
+        <p:spPr>
+          <a:xfrm>
+            <a:off x="658368" y="1554480"/>
+            <a:ext cx="5394960" cy="3977639"/>
+          </a:xfrm>
+          <a:prstGeom prst="roundRect">
+            <a:avLst>
+              <a:gd name="adj" fmla="val 4500"/>
+            </a:avLst>
+          </a:prstGeom>
+          <a:solidFill>
+            <a:srgbClr val="E5F5FB"/>
+          </a:solidFill>
+          <a:ln>
+            <a:noFill/>
+          </a:ln>
+          <a:effectLst/>
+        </p:spPr>
+        <p:style>
+          <a:lnRef idx="1">
+            <a:schemeClr val="accent1"/>
+          </a:lnRef>
+          <a:fillRef idx="3">
+            <a:schemeClr val="accent1"/>
+          </a:fillRef>
+          <a:effectRef idx="2">
+            <a:schemeClr val="accent1"/>
+          </a:effectRef>
+          <a:fontRef idx="minor">
+            <a:schemeClr val="lt1"/>
+          </a:fontRef>
+        </p:style>
+        <p:txBody>
+          <a:bodyPr rtlCol="0" anchor="ctr"/>
+          <a:lstStyle/>
+          <a:p>
+            <a:pPr algn="ctr"/>
+          </a:p>
+        </p:txBody>
+      </p:sp>
+      <p:sp>
+        <p:nvSpPr>
+          <p:cNvPr id="5" name="TextBox 4"/>
+          <p:cNvSpPr txBox="1"/>
+          <p:nvPr/>
+        </p:nvSpPr>
+        <p:spPr>
+          <a:xfrm>
+            <a:off x="859536" y="1700784"/>
+            <a:ext cx="4992624" cy="3703320"/>
+          </a:xfrm>
+          <a:prstGeom prst="rect">
+            <a:avLst/>
+          </a:prstGeom>
+          <a:noFill/>
+        </p:spPr>
+        <p:txBody>
+          <a:bodyPr wrap="square">
+            <a:spAutoFit/>
+          </a:bodyPr>
+          <a:lstStyle/>
+          <a:p>
+            <a:pPr>
+              <a:spcAft>
+                <a:spcPts val="700"/>
+              </a:spcAft>
+            </a:pPr>
+            <a:r>
+              <a:rPr sz="1900" b="1" i="0">
+                <a:solidFill>
+                  <a:srgbClr val="006E96"/>
+                </a:solidFill>
+                <a:latin typeface="Arial"/>
+              </a:rPr>
+              <a:t>Applications</a:t>
+            </a:r>
+          </a:p>
+          <a:p>
+            <a:pPr>
+              <a:spcAft>
+                <a:spcPts val="700"/>
+              </a:spcAft>
+            </a:pPr>
+            <a:r>
+              <a:rPr sz="1600" b="0" i="0">
+                <a:solidFill>
+                  <a:srgbClr val="1A1A1A"/>
+                </a:solidFill>
+                <a:latin typeface="Arial"/>
+              </a:rPr>
+              <a:t>Enrolment system → register-a-learner (PLR)</a:t>
+            </a:r>
+          </a:p>
+          <a:p>
+            <a:pPr>
+              <a:spcAft>
+                <a:spcPts val="700"/>
+              </a:spcAft>
+            </a:pPr>
+            <a:r>
+              <a:rPr sz="1600" b="0" i="0">
+                <a:solidFill>
+                  <a:srgbClr val="1A1A1A"/>
+                </a:solidFill>
+                <a:latin typeface="Arial"/>
+              </a:rPr>
+              <a:t>Exam-management system → run-an-examination (PNEA)</a:t>
+            </a:r>
+          </a:p>
+          <a:p>
+            <a:pPr>
+              <a:spcAft>
+                <a:spcPts val="700"/>
+              </a:spcAft>
+            </a:pPr>
+            <a:r>
+              <a:rPr sz="1600" b="0" i="0">
+                <a:solidFill>
+                  <a:srgbClr val="1A1A1A"/>
+                </a:solidFill>
+                <a:latin typeface="Arial"/>
+              </a:rPr>
+              <a:t>Identity-verification service → prove-identity (PNIA)</a:t>
+            </a:r>
+          </a:p>
+        </p:txBody>
+      </p:sp>
+      <p:sp>
+        <p:nvSpPr>
+          <p:cNvPr id="6" name="Rounded Rectangle 5"/>
+          <p:cNvSpPr/>
+          <p:nvPr/>
+        </p:nvSpPr>
+        <p:spPr>
+          <a:xfrm>
+            <a:off x="6263640" y="1554480"/>
+            <a:ext cx="5394960" cy="3977639"/>
+          </a:xfrm>
+          <a:prstGeom prst="roundRect">
+            <a:avLst>
+              <a:gd name="adj" fmla="val 4500"/>
+            </a:avLst>
+          </a:prstGeom>
+          <a:solidFill>
+            <a:srgbClr val="E5F5FB"/>
+          </a:solidFill>
+          <a:ln>
+            <a:noFill/>
+          </a:ln>
+          <a:effectLst/>
+        </p:spPr>
+        <p:style>
+          <a:lnRef idx="1">
+            <a:schemeClr val="accent1"/>
+          </a:lnRef>
+          <a:fillRef idx="3">
+            <a:schemeClr val="accent1"/>
+          </a:fillRef>
+          <a:effectRef idx="2">
+            <a:schemeClr val="accent1"/>
+          </a:effectRef>
+          <a:fontRef idx="minor">
+            <a:schemeClr val="lt1"/>
+          </a:fontRef>
+        </p:style>
+        <p:txBody>
+          <a:bodyPr rtlCol="0" anchor="ctr"/>
+          <a:lstStyle/>
+          <a:p>
+            <a:pPr algn="ctr"/>
+          </a:p>
+        </p:txBody>
+      </p:sp>
+      <p:sp>
+        <p:nvSpPr>
+          <p:cNvPr id="7" name="TextBox 6"/>
+          <p:cNvSpPr txBox="1"/>
+          <p:nvPr/>
+        </p:nvSpPr>
+        <p:spPr>
+          <a:xfrm>
+            <a:off x="6464808" y="1700784"/>
+            <a:ext cx="4992624" cy="3703320"/>
+          </a:xfrm>
+          <a:prstGeom prst="rect">
+            <a:avLst/>
+          </a:prstGeom>
+          <a:noFill/>
+        </p:spPr>
+        <p:txBody>
+          <a:bodyPr wrap="square">
+            <a:spAutoFit/>
+          </a:bodyPr>
+          <a:lstStyle/>
+          <a:p>
+            <a:pPr>
+              <a:spcAft>
+                <a:spcPts val="700"/>
+              </a:spcAft>
+            </a:pPr>
+            <a:r>
+              <a:rPr sz="1900" b="1" i="0">
+                <a:solidFill>
+                  <a:srgbClr val="006E96"/>
+                </a:solidFill>
+                <a:latin typeface="Arial"/>
+              </a:rPr>
+              <a:t>Technology</a:t>
+            </a:r>
+          </a:p>
+          <a:p>
+            <a:pPr>
+              <a:spcAft>
+                <a:spcPts val="700"/>
+              </a:spcAft>
+            </a:pPr>
+            <a:r>
+              <a:rPr sz="1600" b="0" i="0">
+                <a:solidFill>
+                  <a:srgbClr val="1A1A1A"/>
+                </a:solidFill>
+                <a:latin typeface="Arial"/>
+              </a:rPr>
+              <a:t>Shared identity platform</a:t>
+            </a:r>
+          </a:p>
+          <a:p>
+            <a:pPr>
+              <a:spcAft>
+                <a:spcPts val="700"/>
+              </a:spcAft>
+            </a:pPr>
+            <a:r>
+              <a:rPr sz="1600" b="0" i="0">
+                <a:solidFill>
+                  <a:srgbClr val="1A1A1A"/>
+                </a:solidFill>
+                <a:latin typeface="Arial"/>
+              </a:rPr>
+              <a:t>Data-exchange backbone (PDGA)</a:t>
+            </a:r>
+          </a:p>
+          <a:p>
+            <a:pPr>
+              <a:spcAft>
+                <a:spcPts val="700"/>
+              </a:spcAft>
+            </a:pPr>
+            <a:r>
+              <a:rPr sz="1600" b="0" i="0">
+                <a:solidFill>
+                  <a:srgbClr val="1A1A1A"/>
+                </a:solidFill>
+                <a:latin typeface="Arial"/>
+              </a:rPr>
+              <a:t>Hosting</a:t>
+            </a:r>
+          </a:p>
+        </p:txBody>
+      </p:sp>
+      <p:sp>
+        <p:nvSpPr>
+          <p:cNvPr id="8" name="TextBox 7"/>
+          <p:cNvSpPr txBox="1"/>
+          <p:nvPr/>
+        </p:nvSpPr>
+        <p:spPr>
+          <a:xfrm>
+            <a:off x="658368" y="5715000"/>
+            <a:ext cx="10881360" cy="548640"/>
+          </a:xfrm>
+          <a:prstGeom prst="rect">
+            <a:avLst/>
+          </a:prstGeom>
+          <a:noFill/>
+        </p:spPr>
+        <p:txBody>
+          <a:bodyPr wrap="square">
+            <a:spAutoFit/>
+          </a:bodyPr>
+          <a:lstStyle/>
+          <a:p>
+            <a:r>
+              <a:rPr sz="1550" b="1" i="0">
+                <a:solidFill>
+                  <a:srgbClr val="006E96"/>
+                </a:solidFill>
+                <a:latin typeface="Arial"/>
+              </a:rPr>
+              <a:t>A short list of shared standards — not a server audit.</a:t>
+            </a:r>
+          </a:p>
+        </p:txBody>
+      </p:sp>
+      <p:sp>
+        <p:nvSpPr>
+          <p:cNvPr id="9" name="TextBox 8"/>
+          <p:cNvSpPr txBox="1"/>
+          <p:nvPr/>
+        </p:nvSpPr>
+        <p:spPr>
+          <a:xfrm>
+            <a:off x="457200" y="6473952"/>
+            <a:ext cx="7772400" cy="292608"/>
+          </a:xfrm>
+          <a:prstGeom prst="rect">
+            <a:avLst/>
+          </a:prstGeom>
+          <a:noFill/>
+        </p:spPr>
+        <p:txBody>
+          <a:bodyPr wrap="square">
+            <a:spAutoFit/>
+          </a:bodyPr>
+          <a:lstStyle/>
+          <a:p>
+            <a:r>
+              <a:rPr sz="900" b="0" i="0">
+                <a:solidFill>
+                  <a:srgbClr val="595959"/>
+                </a:solidFill>
+                <a:latin typeface="Arial"/>
+              </a:rPr>
+              <a:t>2.5 · BDAT on a real ministry — the Progressa walkthrough</a:t>
+            </a:r>
+          </a:p>
+        </p:txBody>
+      </p:sp>
+    </p:spTree>
+  </p:cSld>
+  <p:clrMapOvr>
+    <a:masterClrMapping/>
+  </p:clrMapOvr>
+</p:sld>
+</file>
+
+<file path=ppt/slides/slide42.xml><?xml version="1.0" encoding="utf-8"?>
+<p:sld xmlns:a="http://schemas.openxmlformats.org/drawingml/2006/main" xmlns:p="http://schemas.openxmlformats.org/presentationml/2006/main" xmlns:r="http://schemas.openxmlformats.org/officeDocument/2006/relationships">
+  <p:cSld>
+    <p:spTree>
+      <p:nvGrpSpPr>
+        <p:cNvPr id="1" name=""/>
+        <p:cNvGrpSpPr/>
+        <p:nvPr/>
+      </p:nvGrpSpPr>
+      <p:grpSpPr/>
+      <p:sp>
+        <p:nvSpPr>
+          <p:cNvPr id="2" name="TextBox 1"/>
+          <p:cNvSpPr txBox="1"/>
+          <p:nvPr/>
+        </p:nvSpPr>
+        <p:spPr>
+          <a:xfrm>
             <a:off x="1005840" y="1554480"/>
             <a:ext cx="5486400" cy="365760"/>
           </a:xfrm>
@@ -15484,7 +15053,7 @@
 </p:sld>
 </file>
 
-<file path=ppt/slides/slide38.xml><?xml version="1.0" encoding="utf-8"?>
+<file path=ppt/slides/slide43.xml><?xml version="1.0" encoding="utf-8"?>
 <p:sld xmlns:a="http://schemas.openxmlformats.org/drawingml/2006/main" xmlns:p="http://schemas.openxmlformats.org/presentationml/2006/main" xmlns:r="http://schemas.openxmlformats.org/officeDocument/2006/relationships">
   <p:cSld>
     <p:spTree>

--- a/10-Knowledge-Products/KP1-GEA/videos/module_2/en/decks/KP1_M2_2.5_Deck_v0.2.pptx
+++ b/10-Knowledge-Products/KP1-GEA/videos/module_2/en/decks/KP1_M2_2.5_Deck_v0.2.pptx
@@ -11795,7 +11795,7 @@
                 </a:solidFill>
                 <a:latin typeface="Arial"/>
               </a:rPr>
-              <a:t>~5 minutes · standalone video · voice-over on text slides</a:t>
+              <a:t>standalone video · voice-over on text slides</a:t>
             </a:r>
           </a:p>
         </p:txBody>

--- a/10-Knowledge-Products/KP1-GEA/videos/module_2/en/decks/KP1_M2_2.5_Deck_v0.2.pptx
+++ b/10-Knowledge-Products/KP1-GEA/videos/module_2/en/decks/KP1_M2_2.5_Deck_v0.2.pptx
@@ -11659,7 +11659,7 @@
                 </a:solidFill>
                 <a:latin typeface="Arial"/>
               </a:rPr>
-              <a:t>KP1 · MODULE 2 · VIDEO 2.5</a:t>
+              <a:t>MODULE 2 · VIDEO 2.5</a:t>
             </a:r>
           </a:p>
         </p:txBody>
